--- a/Y9_Exploring_Science/9B_Plant_growth/9B_L04_Plant_products.pptx
+++ b/Y9_Exploring_Science/9B_Plant_growth/9B_L04_Plant_products.pptx
@@ -1829,7 +1829,7 @@
         <p:spPr>
           <a:xfrm>
             <a:off x="548640" y="3657600"/>
-            <a:ext cx="10515600" cy="914400"/>
+            <a:ext cx="10515600" cy="1097280"/>
           </a:xfrm>
           <a:prstGeom prst="rect">
             <a:avLst/>
@@ -1842,7 +1842,7 @@
           <a:lstStyle>
             <a:lvl1pPr indent="0" marL="0">
               <a:buNone/>
-              <a:defRPr lang="en-US" sz="2000" dirty="0">
+              <a:defRPr lang="en-US" sz="2400" dirty="0">
                 <a:solidFill>
                   <a:srgbClr val="FFFFFF"/>
                 </a:solidFill>
@@ -1853,7 +1853,7 @@
             <a:pPr indent="0" marL="0">
               <a:buNone/>
             </a:pPr>
-            <a:endParaRPr lang="en-US" sz="2000" dirty="0"/>
+            <a:endParaRPr lang="en-US" sz="2400" dirty="0"/>
           </a:p>
         </p:txBody>
       </p:sp>
@@ -1953,14 +1953,14 @@
               <a:buNone/>
             </a:pPr>
             <a:r>
-              <a:rPr lang="en-US" sz="900" dirty="0">
+              <a:rPr lang="en-US" sz="1000" dirty="0">
                 <a:solidFill>
                   <a:srgbClr val="5B6574"/>
                 </a:solidFill>
               </a:rPr>
               <a:t>Year 9 Science  |  9B Plant growth  |  Lesson 4: Plant products: starch, lipids and proteins</a:t>
             </a:r>
-            <a:endParaRPr lang="en-US" sz="900" dirty="0"/>
+            <a:endParaRPr lang="en-US" sz="1000" dirty="0"/>
           </a:p>
         </p:txBody>
       </p:sp>
@@ -2129,14 +2129,14 @@
               <a:buNone/>
             </a:pPr>
             <a:r>
-              <a:rPr lang="en-US" sz="900" dirty="0">
+              <a:rPr lang="en-US" sz="1000" dirty="0">
                 <a:solidFill>
                   <a:srgbClr val="5B6574"/>
                 </a:solidFill>
               </a:rPr>
               <a:t>Year 9 Science  |  9B Plant growth  |  Lesson 4: Plant products: starch, lipids and proteins</a:t>
             </a:r>
-            <a:endParaRPr lang="en-US" sz="900" dirty="0"/>
+            <a:endParaRPr lang="en-US" sz="1000" dirty="0"/>
           </a:p>
         </p:txBody>
       </p:sp>
@@ -2305,14 +2305,14 @@
               <a:buNone/>
             </a:pPr>
             <a:r>
-              <a:rPr lang="en-US" sz="900" dirty="0">
+              <a:rPr lang="en-US" sz="1000" dirty="0">
                 <a:solidFill>
                   <a:srgbClr val="5B6574"/>
                 </a:solidFill>
               </a:rPr>
               <a:t>Year 9 Science  |  9B Plant growth  |  Lesson 4: Plant products: starch, lipids and proteins</a:t>
             </a:r>
-            <a:endParaRPr lang="en-US" sz="900" dirty="0"/>
+            <a:endParaRPr lang="en-US" sz="1000" dirty="0"/>
           </a:p>
         </p:txBody>
       </p:sp>
@@ -2441,7 +2441,7 @@
           <a:lstStyle>
             <a:lvl1pPr indent="0" marL="0">
               <a:buNone/>
-              <a:defRPr lang="en-US" sz="3000" b="1" dirty="0">
+              <a:defRPr lang="en-US" sz="3400" b="1" dirty="0">
                 <a:solidFill>
                   <a:srgbClr val="3A2E00"/>
                 </a:solidFill>
@@ -2452,7 +2452,7 @@
             <a:pPr indent="0" marL="0">
               <a:buNone/>
             </a:pPr>
-            <a:endParaRPr lang="en-US" sz="3000" dirty="0"/>
+            <a:endParaRPr lang="en-US" sz="3400" dirty="0"/>
           </a:p>
         </p:txBody>
       </p:sp>
@@ -2869,14 +2869,14 @@
               <a:buNone/>
             </a:pPr>
             <a:r>
-              <a:rPr lang="en-US" sz="1300" b="1" spc="200" kern="0" dirty="0">
+              <a:rPr lang="en-US" sz="1400" b="1" spc="200" kern="0" dirty="0">
                 <a:solidFill>
                   <a:srgbClr val="F2CE3E"/>
                 </a:solidFill>
               </a:rPr>
               <a:t>YEAR 9 SCIENCE  ·  9B PLANT GROWTH  ·  LESSON 4 OF 7</a:t>
             </a:r>
-            <a:endParaRPr lang="en-US" sz="1300" dirty="0"/>
+            <a:endParaRPr lang="en-US" sz="1400" dirty="0"/>
           </a:p>
         </p:txBody>
       </p:sp>
@@ -2929,7 +2929,7 @@
         <p:spPr>
           <a:xfrm>
             <a:off x="548640" y="3657600"/>
-            <a:ext cx="10515600" cy="914400"/>
+            <a:ext cx="10515600" cy="1097280"/>
           </a:xfrm>
           <a:prstGeom prst="rect">
             <a:avLst/>
@@ -2945,14 +2945,14 @@
               <a:buNone/>
             </a:pPr>
             <a:r>
-              <a:rPr lang="en-US" sz="2000" dirty="0">
+              <a:rPr lang="en-US" sz="2400" dirty="0">
                 <a:solidFill>
                   <a:srgbClr val="FFFFFF"/>
                 </a:solidFill>
               </a:rPr>
               <a:t>Wood, oil, protein, starch: how can one sugar become all of them?</a:t>
             </a:r>
-            <a:endParaRPr lang="en-US" sz="2000" dirty="0"/>
+            <a:endParaRPr lang="en-US" sz="2400" dirty="0"/>
           </a:p>
         </p:txBody>
       </p:sp>
@@ -2981,14 +2981,14 @@
               <a:buNone/>
             </a:pPr>
             <a:r>
-              <a:rPr lang="en-US" sz="1200" dirty="0">
+              <a:rPr lang="en-US" sz="1400" dirty="0">
                 <a:solidFill>
                   <a:srgbClr val="C9D3E6"/>
                 </a:solidFill>
               </a:rPr>
               <a:t>Exploring Science International 9  ·  Student Book pages 26 to 27  ·  Workbook pages 19</a:t>
             </a:r>
-            <a:endParaRPr lang="en-US" sz="1200" dirty="0"/>
+            <a:endParaRPr lang="en-US" sz="1400" dirty="0"/>
           </a:p>
         </p:txBody>
       </p:sp>
@@ -3044,14 +3044,14 @@
               <a:buNone/>
             </a:pPr>
             <a:r>
-              <a:rPr lang="en-US" sz="3000" b="1" dirty="0">
+              <a:rPr lang="en-US" sz="3400" b="1" dirty="0">
                 <a:solidFill>
                   <a:srgbClr val="3A2E00"/>
                 </a:solidFill>
               </a:rPr>
               <a:t>Safety: testing a leaf for starch</a:t>
             </a:r>
-            <a:endParaRPr lang="en-US" sz="3000" dirty="0"/>
+            <a:endParaRPr lang="en-US" sz="3400" dirty="0"/>
           </a:p>
         </p:txBody>
       </p:sp>
@@ -3139,94 +3139,94 @@
           <a:bodyPr wrap="square" lIns="0" tIns="0" rIns="0" bIns="0" rtlCol="0" anchor="t"/>
           <a:lstStyle/>
           <a:p>
-            <a:pPr marL="228600" indent="-228600">
+            <a:pPr marL="304800" indent="-304800">
               <a:spcAft>
-                <a:spcPts val="600"/>
+                <a:spcPts val="800"/>
               </a:spcAft>
               <a:buSzPct val="100000"/>
               <a:buChar char="•"/>
             </a:pPr>
             <a:r>
-              <a:rPr lang="en-US" sz="2000" dirty="0">
+              <a:rPr lang="en-US" sz="2600" dirty="0">
                 <a:solidFill>
                   <a:srgbClr val="3A2E00"/>
                 </a:solidFill>
               </a:rPr>
               <a:t>Goggles on for the whole practical. Iodine stains skin and clothes and irritates eyes.</a:t>
             </a:r>
-            <a:endParaRPr lang="en-US" sz="2000" dirty="0"/>
-          </a:p>
-          <a:p>
-            <a:pPr marL="228600" indent="-228600">
+            <a:endParaRPr lang="en-US" sz="2600" dirty="0"/>
+          </a:p>
+          <a:p>
+            <a:pPr marL="304800" indent="-304800">
               <a:spcAft>
-                <a:spcPts val="600"/>
+                <a:spcPts val="800"/>
               </a:spcAft>
               <a:buSzPct val="100000"/>
               <a:buChar char="•"/>
             </a:pPr>
             <a:r>
-              <a:rPr lang="en-US" sz="2000" dirty="0">
+              <a:rPr lang="en-US" sz="2600" dirty="0">
                 <a:solidFill>
                   <a:srgbClr val="3A2E00"/>
                 </a:solidFill>
               </a:rPr>
               <a:t>Hot water comes from the kettle. Carry the beaker with two hands and keep it on the bench.</a:t>
             </a:r>
-            <a:endParaRPr lang="en-US" sz="2000" dirty="0"/>
-          </a:p>
-          <a:p>
-            <a:pPr marL="228600" indent="-228600">
+            <a:endParaRPr lang="en-US" sz="2600" dirty="0"/>
+          </a:p>
+          <a:p>
+            <a:pPr marL="304800" indent="-304800">
               <a:spcAft>
-                <a:spcPts val="600"/>
+                <a:spcPts val="800"/>
               </a:spcAft>
               <a:buSzPct val="100000"/>
               <a:buChar char="•"/>
             </a:pPr>
             <a:r>
-              <a:rPr lang="en-US" sz="2000" dirty="0">
+              <a:rPr lang="en-US" sz="2600" dirty="0">
                 <a:solidFill>
                   <a:srgbClr val="3A2E00"/>
                 </a:solidFill>
               </a:rPr>
               <a:t>Ethanol is flammable. Heat it ONLY by standing the boiling tube in the hot water. No Bunsen burners in the room today.</a:t>
             </a:r>
-            <a:endParaRPr lang="en-US" sz="2000" dirty="0"/>
-          </a:p>
-          <a:p>
-            <a:pPr marL="228600" indent="-228600">
+            <a:endParaRPr lang="en-US" sz="2600" dirty="0"/>
+          </a:p>
+          <a:p>
+            <a:pPr marL="304800" indent="-304800">
               <a:spcAft>
-                <a:spcPts val="600"/>
+                <a:spcPts val="800"/>
               </a:spcAft>
               <a:buSzPct val="100000"/>
               <a:buChar char="•"/>
             </a:pPr>
             <a:r>
-              <a:rPr lang="en-US" sz="2000" dirty="0">
+              <a:rPr lang="en-US" sz="2600" dirty="0">
                 <a:solidFill>
                   <a:srgbClr val="3A2E00"/>
                 </a:solidFill>
               </a:rPr>
               <a:t>Use forceps to move the leaf. Do not touch the hot leaf or the hot tube.</a:t>
             </a:r>
-            <a:endParaRPr lang="en-US" sz="2000" dirty="0"/>
-          </a:p>
-          <a:p>
-            <a:pPr marL="228600" indent="-228600">
+            <a:endParaRPr lang="en-US" sz="2600" dirty="0"/>
+          </a:p>
+          <a:p>
+            <a:pPr marL="304800" indent="-304800">
               <a:spcAft>
-                <a:spcPts val="600"/>
+                <a:spcPts val="800"/>
               </a:spcAft>
               <a:buSzPct val="100000"/>
               <a:buChar char="•"/>
             </a:pPr>
             <a:r>
-              <a:rPr lang="en-US" sz="2000" dirty="0">
+              <a:rPr lang="en-US" sz="2600" dirty="0">
                 <a:solidFill>
                   <a:srgbClr val="3A2E00"/>
                 </a:solidFill>
               </a:rPr>
               <a:t>Wash your hands at the end and report any spill at once.</a:t>
             </a:r>
-            <a:endParaRPr lang="en-US" sz="2000" dirty="0"/>
+            <a:endParaRPr lang="en-US" sz="2600" dirty="0"/>
           </a:p>
         </p:txBody>
       </p:sp>
@@ -3381,7 +3381,7 @@
               <a:buNone/>
             </a:pPr>
             <a:r>
-              <a:rPr lang="en-US" sz="1500" b="1" dirty="0">
+              <a:rPr lang="en-US" sz="1800" b="1" dirty="0">
                 <a:solidFill>
                   <a:srgbClr val="7B3A8E"/>
                 </a:solidFill>
@@ -3392,14 +3392,14 @@
               <a:buNone/>
             </a:pPr>
             <a:r>
-              <a:rPr lang="en-US" sz="1500" dirty="0">
+              <a:rPr lang="en-US" sz="1800" dirty="0">
                 <a:solidFill>
                   <a:srgbClr val="141B26"/>
                 </a:solidFill>
               </a:rPr>
               <a:t>To find out which parts of a variegated leaf contain starch.</a:t>
             </a:r>
-            <a:endParaRPr lang="en-US" sz="1500" dirty="0"/>
+            <a:endParaRPr lang="en-US" sz="1800" dirty="0"/>
           </a:p>
         </p:txBody>
       </p:sp>
@@ -3428,14 +3428,14 @@
               <a:buNone/>
             </a:pPr>
             <a:r>
-              <a:rPr lang="en-US" sz="1600" b="1" dirty="0">
+              <a:rPr lang="en-US" sz="1800" b="1" dirty="0">
                 <a:solidFill>
                   <a:srgbClr val="0F2A5F"/>
                 </a:solidFill>
               </a:rPr>
               <a:t>Equipment</a:t>
             </a:r>
-            <a:endParaRPr lang="en-US" sz="1600" dirty="0"/>
+            <a:endParaRPr lang="en-US" sz="1800" dirty="0"/>
           </a:p>
         </p:txBody>
       </p:sp>
@@ -3457,327 +3457,323 @@
           <a:ln/>
         </p:spPr>
         <p:txBody>
-          <a:bodyPr wrap="square" lIns="0" tIns="0" rIns="0" bIns="0" rtlCol="0" anchor="t">
-            <a:normAutofit/>
-          </a:bodyPr>
-          <a:lstStyle/>
-          <a:p>
-            <a:pPr marL="228600" indent="-228600">
+          <a:bodyPr wrap="square" lIns="0" tIns="0" rIns="0" bIns="0" rtlCol="0" anchor="t"/>
+          <a:lstStyle/>
+          <a:p>
+            <a:pPr marL="304800" indent="-304800">
+              <a:spcAft>
+                <a:spcPts val="800"/>
+              </a:spcAft>
+              <a:buSzPct val="100000"/>
+              <a:buChar char="•"/>
+            </a:pPr>
+            <a:r>
+              <a:rPr lang="en-US" sz="1500" dirty="0">
+                <a:solidFill>
+                  <a:srgbClr val="141B26"/>
+                </a:solidFill>
+              </a:rPr>
+              <a:t>variegated leaf from a plant kept in bright light</a:t>
+            </a:r>
+            <a:endParaRPr lang="en-US" sz="1500" dirty="0"/>
+          </a:p>
+          <a:p>
+            <a:pPr marL="304800" indent="-304800">
+              <a:spcAft>
+                <a:spcPts val="800"/>
+              </a:spcAft>
+              <a:buSzPct val="100000"/>
+              <a:buChar char="•"/>
+            </a:pPr>
+            <a:r>
+              <a:rPr lang="en-US" sz="1500" dirty="0">
+                <a:solidFill>
+                  <a:srgbClr val="141B26"/>
+                </a:solidFill>
+              </a:rPr>
+              <a:t>beaker of hot water</a:t>
+            </a:r>
+            <a:endParaRPr lang="en-US" sz="1500" dirty="0"/>
+          </a:p>
+          <a:p>
+            <a:pPr marL="304800" indent="-304800">
+              <a:spcAft>
+                <a:spcPts val="800"/>
+              </a:spcAft>
+              <a:buSzPct val="100000"/>
+              <a:buChar char="•"/>
+            </a:pPr>
+            <a:r>
+              <a:rPr lang="en-US" sz="1500" dirty="0">
+                <a:solidFill>
+                  <a:srgbClr val="141B26"/>
+                </a:solidFill>
+              </a:rPr>
+              <a:t>boiling tube with about 2 cm depth of ethanol</a:t>
+            </a:r>
+            <a:endParaRPr lang="en-US" sz="1500" dirty="0"/>
+          </a:p>
+          <a:p>
+            <a:pPr marL="304800" indent="-304800">
+              <a:spcAft>
+                <a:spcPts val="800"/>
+              </a:spcAft>
+              <a:buSzPct val="100000"/>
+              <a:buChar char="•"/>
+            </a:pPr>
+            <a:r>
+              <a:rPr lang="en-US" sz="1500" dirty="0">
+                <a:solidFill>
+                  <a:srgbClr val="141B26"/>
+                </a:solidFill>
+              </a:rPr>
+              <a:t>forceps</a:t>
+            </a:r>
+            <a:endParaRPr lang="en-US" sz="1500" dirty="0"/>
+          </a:p>
+          <a:p>
+            <a:pPr marL="304800" indent="-304800">
+              <a:spcAft>
+                <a:spcPts val="800"/>
+              </a:spcAft>
+              <a:buSzPct val="100000"/>
+              <a:buChar char="•"/>
+            </a:pPr>
+            <a:r>
+              <a:rPr lang="en-US" sz="1500" dirty="0">
+                <a:solidFill>
+                  <a:srgbClr val="141B26"/>
+                </a:solidFill>
+              </a:rPr>
+              <a:t>white tile</a:t>
+            </a:r>
+            <a:endParaRPr lang="en-US" sz="1500" dirty="0"/>
+          </a:p>
+          <a:p>
+            <a:pPr marL="304800" indent="-304800">
+              <a:spcAft>
+                <a:spcPts val="800"/>
+              </a:spcAft>
+              <a:buSzPct val="100000"/>
+              <a:buChar char="•"/>
+            </a:pPr>
+            <a:r>
+              <a:rPr lang="en-US" sz="1500" dirty="0">
+                <a:solidFill>
+                  <a:srgbClr val="141B26"/>
+                </a:solidFill>
+              </a:rPr>
+              <a:t>iodine solution and dropper</a:t>
+            </a:r>
+            <a:endParaRPr lang="en-US" sz="1500" dirty="0"/>
+          </a:p>
+          <a:p>
+            <a:pPr marL="304800" indent="-304800">
+              <a:spcAft>
+                <a:spcPts val="800"/>
+              </a:spcAft>
+              <a:buSzPct val="100000"/>
+              <a:buChar char="•"/>
+            </a:pPr>
+            <a:r>
+              <a:rPr lang="en-US" sz="1500" dirty="0">
+                <a:solidFill>
+                  <a:srgbClr val="141B26"/>
+                </a:solidFill>
+              </a:rPr>
+              <a:t>goggles</a:t>
+            </a:r>
+            <a:endParaRPr lang="en-US" sz="1500" dirty="0"/>
+          </a:p>
+          <a:p>
+            <a:pPr marL="304800" indent="-304800">
+              <a:spcAft>
+                <a:spcPts val="800"/>
+              </a:spcAft>
+              <a:buSzPct val="100000"/>
+              <a:buChar char="•"/>
+            </a:pPr>
+            <a:r>
+              <a:rPr lang="en-US" sz="1500" dirty="0">
+                <a:solidFill>
+                  <a:srgbClr val="141B26"/>
+                </a:solidFill>
+              </a:rPr>
+              <a:t>worksheet</a:t>
+            </a:r>
+            <a:endParaRPr lang="en-US" sz="1500" dirty="0"/>
+          </a:p>
+        </p:txBody>
+      </p:sp>
+      <p:sp>
+        <p:nvSpPr>
+          <p:cNvPr id="8" name="Text 6"/>
+          <p:cNvSpPr txBox="1"/>
+          <p:nvPr/>
+        </p:nvSpPr>
+        <p:spPr>
+          <a:xfrm>
+            <a:off x="4937760" y="1828800"/>
+            <a:ext cx="6675120" cy="365760"/>
+          </a:xfrm>
+          <a:prstGeom prst="rect">
+            <a:avLst/>
+          </a:prstGeom>
+          <a:noFill/>
+          <a:ln/>
+        </p:spPr>
+        <p:txBody>
+          <a:bodyPr wrap="square" lIns="0" tIns="0" rIns="0" bIns="0" rtlCol="0" anchor="ctr"/>
+          <a:lstStyle/>
+          <a:p>
+            <a:pPr indent="0" marL="0">
+              <a:buNone/>
+            </a:pPr>
+            <a:r>
+              <a:rPr lang="en-US" sz="1800" b="1" dirty="0">
+                <a:solidFill>
+                  <a:srgbClr val="0F2A5F"/>
+                </a:solidFill>
+              </a:rPr>
+              <a:t>Method</a:t>
+            </a:r>
+            <a:endParaRPr lang="en-US" sz="1800" dirty="0"/>
+          </a:p>
+        </p:txBody>
+      </p:sp>
+      <p:sp>
+        <p:nvSpPr>
+          <p:cNvPr id="9" name="Text 7"/>
+          <p:cNvSpPr txBox="1"/>
+          <p:nvPr/>
+        </p:nvSpPr>
+        <p:spPr>
+          <a:xfrm>
+            <a:off x="4937760" y="2240280"/>
+            <a:ext cx="6675120" cy="3200400"/>
+          </a:xfrm>
+          <a:prstGeom prst="rect">
+            <a:avLst/>
+          </a:prstGeom>
+          <a:noFill/>
+          <a:ln/>
+        </p:spPr>
+        <p:txBody>
+          <a:bodyPr wrap="square" lIns="0" tIns="0" rIns="0" bIns="0" rtlCol="0" anchor="t"/>
+          <a:lstStyle/>
+          <a:p>
+            <a:pPr marL="342900" indent="-342900">
               <a:spcAft>
                 <a:spcPts val="600"/>
               </a:spcAft>
               <a:buSzPct val="100000"/>
-              <a:buChar char="•"/>
-            </a:pPr>
-            <a:r>
-              <a:rPr lang="en-US" sz="1300" dirty="0">
+              <a:buFont typeface="+mj-lt"/>
+              <a:buAutoNum type="arabicPeriod" startAt="1"/>
+            </a:pPr>
+            <a:r>
+              <a:rPr lang="en-US" sz="1400" dirty="0">
                 <a:solidFill>
                   <a:srgbClr val="141B26"/>
                 </a:solidFill>
               </a:rPr>
-              <a:t>variegated leaf from a plant kept in bright light</a:t>
-            </a:r>
-            <a:endParaRPr lang="en-US" sz="1300" dirty="0"/>
-          </a:p>
-          <a:p>
-            <a:pPr marL="228600" indent="-228600">
+              <a:t>Draw the leaf on the worksheet. Mark which parts are green and which are white.</a:t>
+            </a:r>
+            <a:endParaRPr lang="en-US" sz="1400" dirty="0"/>
+          </a:p>
+          <a:p>
+            <a:pPr marL="342900" indent="-342900">
               <a:spcAft>
                 <a:spcPts val="600"/>
               </a:spcAft>
               <a:buSzPct val="100000"/>
-              <a:buChar char="•"/>
-            </a:pPr>
-            <a:r>
-              <a:rPr lang="en-US" sz="1300" dirty="0">
+              <a:buFont typeface="+mj-lt"/>
+              <a:buAutoNum type="arabicPeriod" startAt="1"/>
+            </a:pPr>
+            <a:r>
+              <a:rPr lang="en-US" sz="1400" dirty="0">
                 <a:solidFill>
                   <a:srgbClr val="141B26"/>
                 </a:solidFill>
               </a:rPr>
-              <a:t>beaker of hot water</a:t>
-            </a:r>
-            <a:endParaRPr lang="en-US" sz="1300" dirty="0"/>
-          </a:p>
-          <a:p>
-            <a:pPr marL="228600" indent="-228600">
+              <a:t>Hold the leaf with forceps and dip it in the hot water for 30 seconds. This kills the leaf and softens it.</a:t>
+            </a:r>
+            <a:endParaRPr lang="en-US" sz="1400" dirty="0"/>
+          </a:p>
+          <a:p>
+            <a:pPr marL="342900" indent="-342900">
               <a:spcAft>
                 <a:spcPts val="600"/>
               </a:spcAft>
               <a:buSzPct val="100000"/>
-              <a:buChar char="•"/>
-            </a:pPr>
-            <a:r>
-              <a:rPr lang="en-US" sz="1300" dirty="0">
+              <a:buFont typeface="+mj-lt"/>
+              <a:buAutoNum type="arabicPeriod" startAt="1"/>
+            </a:pPr>
+            <a:r>
+              <a:rPr lang="en-US" sz="1400" dirty="0">
                 <a:solidFill>
                   <a:srgbClr val="141B26"/>
                 </a:solidFill>
               </a:rPr>
-              <a:t>boiling tube with about 2 cm depth of ethanol</a:t>
-            </a:r>
-            <a:endParaRPr lang="en-US" sz="1300" dirty="0"/>
-          </a:p>
-          <a:p>
-            <a:pPr marL="228600" indent="-228600">
+              <a:t>Put the leaf in the boiling tube of ethanol. Stand the tube in the beaker of hot water for about 5 minutes, until the leaf is pale and the ethanol is green.</a:t>
+            </a:r>
+            <a:endParaRPr lang="en-US" sz="1400" dirty="0"/>
+          </a:p>
+          <a:p>
+            <a:pPr marL="342900" indent="-342900">
               <a:spcAft>
                 <a:spcPts val="600"/>
               </a:spcAft>
               <a:buSzPct val="100000"/>
-              <a:buChar char="•"/>
-            </a:pPr>
-            <a:r>
-              <a:rPr lang="en-US" sz="1300" dirty="0">
+              <a:buFont typeface="+mj-lt"/>
+              <a:buAutoNum type="arabicPeriod" startAt="1"/>
+            </a:pPr>
+            <a:r>
+              <a:rPr lang="en-US" sz="1400" dirty="0">
                 <a:solidFill>
                   <a:srgbClr val="141B26"/>
                 </a:solidFill>
               </a:rPr>
-              <a:t>forceps</a:t>
-            </a:r>
-            <a:endParaRPr lang="en-US" sz="1300" dirty="0"/>
-          </a:p>
-          <a:p>
-            <a:pPr marL="228600" indent="-228600">
+              <a:t>Take the leaf out with forceps and dip it in the hot water again to soften it.</a:t>
+            </a:r>
+            <a:endParaRPr lang="en-US" sz="1400" dirty="0"/>
+          </a:p>
+          <a:p>
+            <a:pPr marL="342900" indent="-342900">
               <a:spcAft>
                 <a:spcPts val="600"/>
               </a:spcAft>
               <a:buSzPct val="100000"/>
-              <a:buChar char="•"/>
-            </a:pPr>
-            <a:r>
-              <a:rPr lang="en-US" sz="1300" dirty="0">
+              <a:buFont typeface="+mj-lt"/>
+              <a:buAutoNum type="arabicPeriod" startAt="1"/>
+            </a:pPr>
+            <a:r>
+              <a:rPr lang="en-US" sz="1400" dirty="0">
                 <a:solidFill>
                   <a:srgbClr val="141B26"/>
                 </a:solidFill>
               </a:rPr>
-              <a:t>white tile</a:t>
-            </a:r>
-            <a:endParaRPr lang="en-US" sz="1300" dirty="0"/>
-          </a:p>
-          <a:p>
-            <a:pPr marL="228600" indent="-228600">
+              <a:t>Spread the leaf on the white tile. Cover it with drops of iodine solution.</a:t>
+            </a:r>
+            <a:endParaRPr lang="en-US" sz="1400" dirty="0"/>
+          </a:p>
+          <a:p>
+            <a:pPr marL="342900" indent="-342900">
               <a:spcAft>
                 <a:spcPts val="600"/>
               </a:spcAft>
               <a:buSzPct val="100000"/>
-              <a:buChar char="•"/>
-            </a:pPr>
-            <a:r>
-              <a:rPr lang="en-US" sz="1300" dirty="0">
-                <a:solidFill>
-                  <a:srgbClr val="141B26"/>
-                </a:solidFill>
-              </a:rPr>
-              <a:t>iodine solution and dropper</a:t>
-            </a:r>
-            <a:endParaRPr lang="en-US" sz="1300" dirty="0"/>
-          </a:p>
-          <a:p>
-            <a:pPr marL="228600" indent="-228600">
-              <a:spcAft>
-                <a:spcPts val="600"/>
-              </a:spcAft>
-              <a:buSzPct val="100000"/>
-              <a:buChar char="•"/>
-            </a:pPr>
-            <a:r>
-              <a:rPr lang="en-US" sz="1300" dirty="0">
-                <a:solidFill>
-                  <a:srgbClr val="141B26"/>
-                </a:solidFill>
-              </a:rPr>
-              <a:t>goggles</a:t>
-            </a:r>
-            <a:endParaRPr lang="en-US" sz="1300" dirty="0"/>
-          </a:p>
-          <a:p>
-            <a:pPr marL="228600" indent="-228600">
-              <a:spcAft>
-                <a:spcPts val="600"/>
-              </a:spcAft>
-              <a:buSzPct val="100000"/>
-              <a:buChar char="•"/>
-            </a:pPr>
-            <a:r>
-              <a:rPr lang="en-US" sz="1300" dirty="0">
-                <a:solidFill>
-                  <a:srgbClr val="141B26"/>
-                </a:solidFill>
-              </a:rPr>
-              <a:t>worksheet</a:t>
-            </a:r>
-            <a:endParaRPr lang="en-US" sz="1300" dirty="0"/>
-          </a:p>
-        </p:txBody>
-      </p:sp>
-      <p:sp>
-        <p:nvSpPr>
-          <p:cNvPr id="8" name="Text 6"/>
-          <p:cNvSpPr txBox="1"/>
-          <p:nvPr/>
-        </p:nvSpPr>
-        <p:spPr>
-          <a:xfrm>
-            <a:off x="4937760" y="1828800"/>
-            <a:ext cx="6675120" cy="365760"/>
-          </a:xfrm>
-          <a:prstGeom prst="rect">
-            <a:avLst/>
-          </a:prstGeom>
-          <a:noFill/>
-          <a:ln/>
-        </p:spPr>
-        <p:txBody>
-          <a:bodyPr wrap="square" lIns="0" tIns="0" rIns="0" bIns="0" rtlCol="0" anchor="ctr"/>
-          <a:lstStyle/>
-          <a:p>
-            <a:pPr indent="0" marL="0">
-              <a:buNone/>
-            </a:pPr>
-            <a:r>
-              <a:rPr lang="en-US" sz="1600" b="1" dirty="0">
-                <a:solidFill>
-                  <a:srgbClr val="0F2A5F"/>
-                </a:solidFill>
-              </a:rPr>
-              <a:t>Method</a:t>
-            </a:r>
-            <a:endParaRPr lang="en-US" sz="1600" dirty="0"/>
-          </a:p>
-        </p:txBody>
-      </p:sp>
-      <p:sp>
-        <p:nvSpPr>
-          <p:cNvPr id="9" name="Text 7"/>
-          <p:cNvSpPr txBox="1"/>
-          <p:nvPr/>
-        </p:nvSpPr>
-        <p:spPr>
-          <a:xfrm>
-            <a:off x="4937760" y="2240280"/>
-            <a:ext cx="6675120" cy="3200400"/>
-          </a:xfrm>
-          <a:prstGeom prst="rect">
-            <a:avLst/>
-          </a:prstGeom>
-          <a:noFill/>
-          <a:ln/>
-        </p:spPr>
-        <p:txBody>
-          <a:bodyPr wrap="square" lIns="0" tIns="0" rIns="0" bIns="0" rtlCol="0" anchor="t">
-            <a:normAutofit/>
-          </a:bodyPr>
-          <a:lstStyle/>
-          <a:p>
-            <a:pPr marL="342900" indent="-342900">
-              <a:spcAft>
-                <a:spcPts val="500"/>
-              </a:spcAft>
-              <a:buSzPct val="100000"/>
               <a:buFont typeface="+mj-lt"/>
               <a:buAutoNum type="arabicPeriod" startAt="1"/>
             </a:pPr>
             <a:r>
-              <a:rPr lang="en-US" sz="1300" dirty="0">
+              <a:rPr lang="en-US" sz="1400" dirty="0">
                 <a:solidFill>
                   <a:srgbClr val="141B26"/>
                 </a:solidFill>
               </a:rPr>
-              <a:t>Draw the leaf on the worksheet. Mark which parts are green and which are white.</a:t>
-            </a:r>
-            <a:endParaRPr lang="en-US" sz="1300" dirty="0"/>
-          </a:p>
-          <a:p>
-            <a:pPr marL="342900" indent="-342900">
-              <a:spcAft>
-                <a:spcPts val="500"/>
-              </a:spcAft>
-              <a:buSzPct val="100000"/>
-              <a:buFont typeface="+mj-lt"/>
-              <a:buAutoNum type="arabicPeriod" startAt="1"/>
-            </a:pPr>
-            <a:r>
-              <a:rPr lang="en-US" sz="1300" dirty="0">
-                <a:solidFill>
-                  <a:srgbClr val="141B26"/>
-                </a:solidFill>
-              </a:rPr>
-              <a:t>Hold the leaf with forceps and dip it in the hot water for 30 seconds. This kills the leaf and softens it.</a:t>
-            </a:r>
-            <a:endParaRPr lang="en-US" sz="1300" dirty="0"/>
-          </a:p>
-          <a:p>
-            <a:pPr marL="342900" indent="-342900">
-              <a:spcAft>
-                <a:spcPts val="500"/>
-              </a:spcAft>
-              <a:buSzPct val="100000"/>
-              <a:buFont typeface="+mj-lt"/>
-              <a:buAutoNum type="arabicPeriod" startAt="1"/>
-            </a:pPr>
-            <a:r>
-              <a:rPr lang="en-US" sz="1300" dirty="0">
-                <a:solidFill>
-                  <a:srgbClr val="141B26"/>
-                </a:solidFill>
-              </a:rPr>
-              <a:t>Put the leaf in the boiling tube of ethanol. Stand the tube in the beaker of hot water for about 5 minutes, until the leaf is pale and the ethanol is green.</a:t>
-            </a:r>
-            <a:endParaRPr lang="en-US" sz="1300" dirty="0"/>
-          </a:p>
-          <a:p>
-            <a:pPr marL="342900" indent="-342900">
-              <a:spcAft>
-                <a:spcPts val="500"/>
-              </a:spcAft>
-              <a:buSzPct val="100000"/>
-              <a:buFont typeface="+mj-lt"/>
-              <a:buAutoNum type="arabicPeriod" startAt="1"/>
-            </a:pPr>
-            <a:r>
-              <a:rPr lang="en-US" sz="1300" dirty="0">
-                <a:solidFill>
-                  <a:srgbClr val="141B26"/>
-                </a:solidFill>
-              </a:rPr>
-              <a:t>Take the leaf out with forceps and dip it in the hot water again to soften it.</a:t>
-            </a:r>
-            <a:endParaRPr lang="en-US" sz="1300" dirty="0"/>
-          </a:p>
-          <a:p>
-            <a:pPr marL="342900" indent="-342900">
-              <a:spcAft>
-                <a:spcPts val="500"/>
-              </a:spcAft>
-              <a:buSzPct val="100000"/>
-              <a:buFont typeface="+mj-lt"/>
-              <a:buAutoNum type="arabicPeriod" startAt="1"/>
-            </a:pPr>
-            <a:r>
-              <a:rPr lang="en-US" sz="1300" dirty="0">
-                <a:solidFill>
-                  <a:srgbClr val="141B26"/>
-                </a:solidFill>
-              </a:rPr>
-              <a:t>Spread the leaf on the white tile. Cover it with drops of iodine solution.</a:t>
-            </a:r>
-            <a:endParaRPr lang="en-US" sz="1300" dirty="0"/>
-          </a:p>
-          <a:p>
-            <a:pPr marL="342900" indent="-342900">
-              <a:spcAft>
-                <a:spcPts val="500"/>
-              </a:spcAft>
-              <a:buSzPct val="100000"/>
-              <a:buFont typeface="+mj-lt"/>
-              <a:buAutoNum type="arabicPeriod" startAt="1"/>
-            </a:pPr>
-            <a:r>
-              <a:rPr lang="en-US" sz="1300" dirty="0">
-                <a:solidFill>
-                  <a:srgbClr val="141B26"/>
-                </a:solidFill>
-              </a:rPr>
               <a:t>Wait one minute. Draw the result and label where it went blue-black.</a:t>
             </a:r>
-            <a:endParaRPr lang="en-US" sz="1300" dirty="0"/>
+            <a:endParaRPr lang="en-US" sz="1400" dirty="0"/>
           </a:p>
         </p:txBody>
       </p:sp>
@@ -3824,16 +3820,14 @@
           <a:ln/>
         </p:spPr>
         <p:txBody>
-          <a:bodyPr wrap="square" lIns="0" tIns="0" rIns="0" bIns="0" rtlCol="0" anchor="ctr">
-            <a:normAutofit/>
-          </a:bodyPr>
+          <a:bodyPr wrap="square" lIns="0" tIns="0" rIns="0" bIns="0" rtlCol="0" anchor="ctr"/>
           <a:lstStyle/>
           <a:p>
             <a:pPr indent="0" marL="0">
               <a:buNone/>
             </a:pPr>
             <a:r>
-              <a:rPr lang="en-US" sz="1300" b="1" dirty="0">
+              <a:rPr lang="en-US" sz="1500" b="1" dirty="0">
                 <a:solidFill>
                   <a:srgbClr val="3A2E00"/>
                 </a:solidFill>
@@ -3844,14 +3838,14 @@
               <a:buNone/>
             </a:pPr>
             <a:r>
-              <a:rPr lang="en-US" sz="1300" dirty="0">
+              <a:rPr lang="en-US" sz="1500" dirty="0">
                 <a:solidFill>
                   <a:srgbClr val="3A2E00"/>
                 </a:solidFill>
               </a:rPr>
               <a:t>Goggles on. Ethanol only in the water bath, never near a flame. Forceps for the leaf.</a:t>
             </a:r>
-            <a:endParaRPr lang="en-US" sz="1300" dirty="0"/>
+            <a:endParaRPr lang="en-US" sz="1500" dirty="0"/>
           </a:p>
         </p:txBody>
       </p:sp>
@@ -4044,23 +4038,21 @@
           <a:ln/>
         </p:spPr>
         <p:txBody>
-          <a:bodyPr wrap="square" lIns="0" tIns="0" rIns="0" bIns="0" rtlCol="0" anchor="t">
-            <a:normAutofit/>
-          </a:bodyPr>
+          <a:bodyPr wrap="square" lIns="0" tIns="0" rIns="0" bIns="0" rtlCol="0" anchor="t"/>
           <a:lstStyle/>
           <a:p>
             <a:pPr indent="0" marL="0">
               <a:buNone/>
             </a:pPr>
             <a:r>
-              <a:rPr lang="en-US" sz="2200" b="1" dirty="0">
+              <a:rPr lang="en-US" sz="2600" b="1" dirty="0">
                 <a:solidFill>
                   <a:srgbClr val="0F2A5F"/>
                 </a:solidFill>
               </a:rPr>
               <a:t>A tomato plant in a greenhouse gets lots of light, water and carbon dioxide, but the soil has very few nitrates. Explain why it grows badly even though it photosynthesises well.</a:t>
             </a:r>
-            <a:endParaRPr lang="en-US" sz="2200" dirty="0"/>
+            <a:endParaRPr lang="en-US" sz="2600" dirty="0"/>
           </a:p>
         </p:txBody>
       </p:sp>
@@ -4109,9 +4101,7 @@
           <a:ln/>
         </p:spPr>
         <p:txBody>
-          <a:bodyPr wrap="square" lIns="0" tIns="0" rIns="0" bIns="0" rtlCol="0" anchor="t">
-            <a:normAutofit/>
-          </a:bodyPr>
+          <a:bodyPr wrap="square" lIns="0" tIns="0" rIns="0" bIns="0" rtlCol="0" anchor="t"/>
           <a:lstStyle/>
           <a:p>
             <a:pPr indent="0" marL="0">
@@ -4121,14 +4111,14 @@
               <a:buNone/>
             </a:pPr>
             <a:r>
-              <a:rPr lang="en-US" sz="1500" b="1" dirty="0">
+              <a:rPr lang="en-US" sz="1800" b="1" dirty="0">
                 <a:solidFill>
                   <a:srgbClr val="7B3A8E"/>
                 </a:solidFill>
               </a:rPr>
               <a:t>Sentence frames</a:t>
             </a:r>
-            <a:endParaRPr lang="en-US" sz="1500" dirty="0"/>
+            <a:endParaRPr lang="en-US" sz="1800" dirty="0"/>
           </a:p>
           <a:p>
             <a:pPr indent="0" marL="0">
@@ -4138,14 +4128,14 @@
               <a:buNone/>
             </a:pPr>
             <a:r>
-              <a:rPr lang="en-US" sz="1500" dirty="0">
+              <a:rPr lang="en-US" sz="1800" dirty="0">
                 <a:solidFill>
                   <a:srgbClr val="141B26"/>
                 </a:solidFill>
               </a:rPr>
               <a:t>The plant can make ___ by photosynthesis, but ___.</a:t>
             </a:r>
-            <a:endParaRPr lang="en-US" sz="1500" dirty="0"/>
+            <a:endParaRPr lang="en-US" sz="1800" dirty="0"/>
           </a:p>
           <a:p>
             <a:pPr indent="0" marL="0">
@@ -4155,14 +4145,14 @@
               <a:buNone/>
             </a:pPr>
             <a:r>
-              <a:rPr lang="en-US" sz="1500" dirty="0">
+              <a:rPr lang="en-US" sz="1800" dirty="0">
                 <a:solidFill>
                   <a:srgbClr val="141B26"/>
                 </a:solidFill>
               </a:rPr>
               <a:t>Without nitrates it cannot make ___, so it cannot make ___.</a:t>
             </a:r>
-            <a:endParaRPr lang="en-US" sz="1500" dirty="0"/>
+            <a:endParaRPr lang="en-US" sz="1800" dirty="0"/>
           </a:p>
           <a:p>
             <a:pPr indent="0" marL="0">
@@ -4172,14 +4162,14 @@
               <a:buNone/>
             </a:pPr>
             <a:r>
-              <a:rPr lang="en-US" sz="1500" dirty="0">
+              <a:rPr lang="en-US" sz="1800" dirty="0">
                 <a:solidFill>
                   <a:srgbClr val="141B26"/>
                 </a:solidFill>
               </a:rPr>
               <a:t>Enzymes are ___, so ___.</a:t>
             </a:r>
-            <a:endParaRPr lang="en-US" sz="1500" dirty="0"/>
+            <a:endParaRPr lang="en-US" sz="1800" dirty="0"/>
           </a:p>
         </p:txBody>
       </p:sp>
@@ -4379,14 +4369,14 @@
               <a:buNone/>
             </a:pPr>
             <a:r>
-              <a:rPr lang="en-US" sz="1400" i="1" dirty="0">
+              <a:rPr lang="en-US" sz="1600" i="1" dirty="0">
                 <a:solidFill>
                   <a:srgbClr val="5B6574"/>
                 </a:solidFill>
               </a:rPr>
               <a:t>On your worksheet exit ticket. Work alone. Hand it in as you leave.</a:t>
             </a:r>
-            <a:endParaRPr lang="en-US" sz="1400" dirty="0"/>
+            <a:endParaRPr lang="en-US" sz="1600" dirty="0"/>
           </a:p>
         </p:txBody>
       </p:sp>
@@ -4399,7 +4389,7 @@
         <p:spPr>
           <a:xfrm>
             <a:off x="548640" y="1828800"/>
-            <a:ext cx="10881360" cy="1188720"/>
+            <a:ext cx="9692640" cy="1188720"/>
           </a:xfrm>
           <a:prstGeom prst="rect">
             <a:avLst/>
@@ -4408,16 +4398,14 @@
           <a:ln/>
         </p:spPr>
         <p:txBody>
-          <a:bodyPr wrap="square" lIns="0" tIns="0" rIns="0" bIns="0" rtlCol="0" anchor="t">
-            <a:normAutofit/>
-          </a:bodyPr>
+          <a:bodyPr wrap="square" lIns="0" tIns="0" rIns="0" bIns="0" rtlCol="0" anchor="t"/>
           <a:lstStyle/>
           <a:p>
             <a:pPr indent="0" marL="0">
               <a:buNone/>
             </a:pPr>
             <a:r>
-              <a:rPr lang="en-US" sz="1800" b="1" dirty="0">
+              <a:rPr lang="en-US" sz="2200" b="1" dirty="0">
                 <a:solidFill>
                   <a:srgbClr val="7B3A8E"/>
                 </a:solidFill>
@@ -4428,14 +4416,14 @@
               <a:buNone/>
             </a:pPr>
             <a:r>
-              <a:rPr lang="en-US" sz="1800" dirty="0">
+              <a:rPr lang="en-US" sz="2200" dirty="0">
                 <a:solidFill>
                   <a:srgbClr val="141B26"/>
                 </a:solidFill>
               </a:rPr>
               <a:t>Which solution tests for starch, and what colour does it turn?</a:t>
             </a:r>
-            <a:endParaRPr lang="en-US" sz="1800" dirty="0"/>
+            <a:endParaRPr lang="en-US" sz="2200" dirty="0"/>
           </a:p>
         </p:txBody>
       </p:sp>
@@ -4448,7 +4436,7 @@
         <p:spPr>
           <a:xfrm>
             <a:off x="548640" y="3017520"/>
-            <a:ext cx="10881360" cy="1188720"/>
+            <a:ext cx="9692640" cy="1188720"/>
           </a:xfrm>
           <a:prstGeom prst="rect">
             <a:avLst/>
@@ -4457,16 +4445,14 @@
           <a:ln/>
         </p:spPr>
         <p:txBody>
-          <a:bodyPr wrap="square" lIns="0" tIns="0" rIns="0" bIns="0" rtlCol="0" anchor="t">
-            <a:normAutofit/>
-          </a:bodyPr>
+          <a:bodyPr wrap="square" lIns="0" tIns="0" rIns="0" bIns="0" rtlCol="0" anchor="t"/>
           <a:lstStyle/>
           <a:p>
             <a:pPr indent="0" marL="0">
               <a:buNone/>
             </a:pPr>
             <a:r>
-              <a:rPr lang="en-US" sz="1800" b="1" dirty="0">
+              <a:rPr lang="en-US" sz="2200" b="1" dirty="0">
                 <a:solidFill>
                   <a:srgbClr val="7B3A8E"/>
                 </a:solidFill>
@@ -4477,14 +4463,14 @@
               <a:buNone/>
             </a:pPr>
             <a:r>
-              <a:rPr lang="en-US" sz="1800" dirty="0">
+              <a:rPr lang="en-US" sz="2200" dirty="0">
                 <a:solidFill>
                   <a:srgbClr val="141B26"/>
                 </a:solidFill>
               </a:rPr>
               <a:t>Why do seeds need a store of starch?</a:t>
             </a:r>
-            <a:endParaRPr lang="en-US" sz="1800" dirty="0"/>
+            <a:endParaRPr lang="en-US" sz="2200" dirty="0"/>
           </a:p>
         </p:txBody>
       </p:sp>
@@ -4497,7 +4483,7 @@
         <p:spPr>
           <a:xfrm>
             <a:off x="548640" y="4206240"/>
-            <a:ext cx="10881360" cy="1188720"/>
+            <a:ext cx="9692640" cy="1188720"/>
           </a:xfrm>
           <a:prstGeom prst="rect">
             <a:avLst/>
@@ -4506,16 +4492,14 @@
           <a:ln/>
         </p:spPr>
         <p:txBody>
-          <a:bodyPr wrap="square" lIns="0" tIns="0" rIns="0" bIns="0" rtlCol="0" anchor="t">
-            <a:normAutofit/>
-          </a:bodyPr>
+          <a:bodyPr wrap="square" lIns="0" tIns="0" rIns="0" bIns="0" rtlCol="0" anchor="t"/>
           <a:lstStyle/>
           <a:p>
             <a:pPr indent="0" marL="0">
               <a:buNone/>
             </a:pPr>
             <a:r>
-              <a:rPr lang="en-US" sz="1800" b="1" dirty="0">
+              <a:rPr lang="en-US" sz="2200" b="1" dirty="0">
                 <a:solidFill>
                   <a:srgbClr val="7B3A8E"/>
                 </a:solidFill>
@@ -4526,14 +4510,14 @@
               <a:buNone/>
             </a:pPr>
             <a:r>
-              <a:rPr lang="en-US" sz="1800" dirty="0">
+              <a:rPr lang="en-US" sz="2200" dirty="0">
                 <a:solidFill>
                   <a:srgbClr val="141B26"/>
                 </a:solidFill>
               </a:rPr>
               <a:t>What are enzymes made of, and which mineral salt do plants need to make them?</a:t>
             </a:r>
-            <a:endParaRPr lang="en-US" sz="1800" dirty="0"/>
+            <a:endParaRPr lang="en-US" sz="2200" dirty="0"/>
           </a:p>
         </p:txBody>
       </p:sp>
@@ -4792,7 +4776,7 @@
         <p:spPr>
           <a:xfrm>
             <a:off x="548640" y="1371600"/>
-            <a:ext cx="10881360" cy="4480560"/>
+            <a:ext cx="10881360" cy="4114800"/>
           </a:xfrm>
           <a:prstGeom prst="rect">
             <a:avLst/>
@@ -4801,99 +4785,97 @@
           <a:ln/>
         </p:spPr>
         <p:txBody>
-          <a:bodyPr wrap="square" lIns="0" tIns="0" rIns="0" bIns="0" rtlCol="0" anchor="t">
-            <a:normAutofit/>
-          </a:bodyPr>
+          <a:bodyPr wrap="square" lIns="0" tIns="0" rIns="0" bIns="0" rtlCol="0" anchor="t"/>
           <a:lstStyle/>
           <a:p>
             <a:pPr marL="342900" indent="-342900">
               <a:spcAft>
-                <a:spcPts val="1000"/>
+                <a:spcPts val="1200"/>
               </a:spcAft>
               <a:buSzPct val="100000"/>
               <a:buChar char="✓"/>
             </a:pPr>
             <a:r>
-              <a:rPr lang="en-US" sz="1700" dirty="0">
+              <a:rPr lang="en-US" sz="2000" dirty="0">
                 <a:solidFill>
                   <a:srgbClr val="141B26"/>
                 </a:solidFill>
               </a:rPr>
               <a:t>Glucose is joined into starch (an energy store) and cellulose (cell walls); sugars are moved in the phloem.</a:t>
             </a:r>
-            <a:endParaRPr lang="en-US" sz="1700" dirty="0"/>
+            <a:endParaRPr lang="en-US" sz="2000" dirty="0"/>
           </a:p>
           <a:p>
             <a:pPr marL="342900" indent="-342900">
               <a:spcAft>
-                <a:spcPts val="1000"/>
+                <a:spcPts val="1200"/>
               </a:spcAft>
               <a:buSzPct val="100000"/>
               <a:buChar char="✓"/>
             </a:pPr>
             <a:r>
-              <a:rPr lang="en-US" sz="1700" dirty="0">
+              <a:rPr lang="en-US" sz="2000" dirty="0">
                 <a:solidFill>
                   <a:srgbClr val="141B26"/>
                 </a:solidFill>
               </a:rPr>
               <a:t>Lipids make the cuticle, cell membranes and energy stores in seeds and fruits.</a:t>
             </a:r>
-            <a:endParaRPr lang="en-US" sz="1700" dirty="0"/>
+            <a:endParaRPr lang="en-US" sz="2000" dirty="0"/>
           </a:p>
           <a:p>
             <a:pPr marL="342900" indent="-342900">
               <a:spcAft>
-                <a:spcPts val="1000"/>
+                <a:spcPts val="1200"/>
               </a:spcAft>
               <a:buSzPct val="100000"/>
               <a:buChar char="✓"/>
             </a:pPr>
             <a:r>
-              <a:rPr lang="en-US" sz="1700" dirty="0">
+              <a:rPr lang="en-US" sz="2000" dirty="0">
                 <a:solidFill>
                   <a:srgbClr val="141B26"/>
                 </a:solidFill>
               </a:rPr>
               <a:t>Proteins are chains of amino acids, which need nitrogen from nitrates; all enzymes are proteins.</a:t>
             </a:r>
-            <a:endParaRPr lang="en-US" sz="1700" dirty="0"/>
+            <a:endParaRPr lang="en-US" sz="2000" dirty="0"/>
           </a:p>
           <a:p>
             <a:pPr marL="342900" indent="-342900">
               <a:spcAft>
-                <a:spcPts val="1000"/>
+                <a:spcPts val="1200"/>
               </a:spcAft>
               <a:buSzPct val="100000"/>
               <a:buChar char="✓"/>
             </a:pPr>
             <a:r>
-              <a:rPr lang="en-US" sz="1700" dirty="0">
+              <a:rPr lang="en-US" sz="2000" dirty="0">
                 <a:solidFill>
                   <a:srgbClr val="141B26"/>
                 </a:solidFill>
               </a:rPr>
               <a:t>A germinating seed uses water, enzymes and respiration to turn its stored starch into growth.</a:t>
             </a:r>
-            <a:endParaRPr lang="en-US" sz="1700" dirty="0"/>
+            <a:endParaRPr lang="en-US" sz="2000" dirty="0"/>
           </a:p>
           <a:p>
             <a:pPr marL="342900" indent="-342900">
               <a:spcAft>
-                <a:spcPts val="1000"/>
+                <a:spcPts val="1200"/>
               </a:spcAft>
               <a:buSzPct val="100000"/>
               <a:buChar char="✓"/>
             </a:pPr>
             <a:r>
-              <a:rPr lang="en-US" sz="1700" dirty="0">
+              <a:rPr lang="en-US" sz="2000" dirty="0">
                 <a:solidFill>
                   <a:srgbClr val="141B26"/>
                 </a:solidFill>
               </a:rPr>
               <a:t>Iodine tests for starch (blue-black); Benedict's tests for glucose (orange-red when heated).</a:t>
             </a:r>
-            <a:endParaRPr lang="en-US" sz="1700" dirty="0"/>
+            <a:endParaRPr lang="en-US" sz="2000" dirty="0"/>
           </a:p>
         </p:txBody>
       </p:sp>
@@ -4922,7 +4904,7 @@
               <a:buNone/>
             </a:pPr>
             <a:r>
-              <a:rPr lang="en-US" sz="1300" b="1" dirty="0">
+              <a:rPr lang="en-US" sz="1500" b="1" dirty="0">
                 <a:solidFill>
                   <a:srgbClr val="7B3A8E"/>
                 </a:solidFill>
@@ -4933,14 +4915,14 @@
               <a:buNone/>
             </a:pPr>
             <a:r>
-              <a:rPr lang="en-US" sz="1300" dirty="0">
+              <a:rPr lang="en-US" sz="1500" dirty="0">
                 <a:solidFill>
                   <a:srgbClr val="141B26"/>
                 </a:solidFill>
               </a:rPr>
               <a:t>Growing crops: how farmers use fertilisers, pesticides and new varieties to get a bigger yield.</a:t>
             </a:r>
-            <a:endParaRPr lang="en-US" sz="1300" dirty="0"/>
+            <a:endParaRPr lang="en-US" sz="1500" dirty="0"/>
           </a:p>
         </p:txBody>
       </p:sp>
@@ -5208,60 +5190,58 @@
           <a:ln/>
         </p:spPr>
         <p:txBody>
-          <a:bodyPr wrap="square" lIns="0" tIns="0" rIns="0" bIns="0" rtlCol="0" anchor="t">
-            <a:normAutofit/>
-          </a:bodyPr>
+          <a:bodyPr wrap="square" lIns="0" tIns="0" rIns="0" bIns="0" rtlCol="0" anchor="t"/>
           <a:lstStyle/>
           <a:p>
             <a:pPr indent="0" marL="0">
               <a:spcAft>
-                <a:spcPts val="1000"/>
+                <a:spcPts val="1200"/>
               </a:spcAft>
               <a:buNone/>
             </a:pPr>
             <a:r>
-              <a:rPr lang="en-US" sz="2000" dirty="0">
+              <a:rPr lang="en-US" sz="2400" dirty="0">
                 <a:solidFill>
                   <a:srgbClr val="141B26"/>
                 </a:solidFill>
               </a:rPr>
               <a:t>1. What colour change would you see if you added iodine solution to a slice of potato?</a:t>
             </a:r>
-            <a:endParaRPr lang="en-US" sz="2000" dirty="0"/>
+            <a:endParaRPr lang="en-US" sz="2400" dirty="0"/>
           </a:p>
           <a:p>
             <a:pPr indent="0" marL="0">
               <a:spcAft>
-                <a:spcPts val="1000"/>
+                <a:spcPts val="1200"/>
               </a:spcAft>
               <a:buNone/>
             </a:pPr>
             <a:r>
-              <a:rPr lang="en-US" sz="2000" dirty="0">
+              <a:rPr lang="en-US" sz="2400" dirty="0">
                 <a:solidFill>
                   <a:srgbClr val="141B26"/>
                 </a:solidFill>
               </a:rPr>
               <a:t>2. Which substance in the potato causes this change?</a:t>
             </a:r>
-            <a:endParaRPr lang="en-US" sz="2000" dirty="0"/>
+            <a:endParaRPr lang="en-US" sz="2400" dirty="0"/>
           </a:p>
           <a:p>
             <a:pPr indent="0" marL="0">
               <a:spcAft>
-                <a:spcPts val="1000"/>
+                <a:spcPts val="1200"/>
               </a:spcAft>
               <a:buNone/>
             </a:pPr>
             <a:r>
-              <a:rPr lang="en-US" sz="2000" dirty="0">
+              <a:rPr lang="en-US" sz="2400" dirty="0">
                 <a:solidFill>
                   <a:srgbClr val="141B26"/>
                 </a:solidFill>
               </a:rPr>
               <a:t>3. Which substance made in photosynthesis was used to make it?</a:t>
             </a:r>
-            <a:endParaRPr lang="en-US" sz="2000" dirty="0"/>
+            <a:endParaRPr lang="en-US" sz="2400" dirty="0"/>
           </a:p>
         </p:txBody>
       </p:sp>
@@ -5444,8 +5424,8 @@
         </p:nvSpPr>
         <p:spPr>
           <a:xfrm>
-            <a:off x="548640" y="1325880"/>
-            <a:ext cx="5669280" cy="457200"/>
+            <a:off x="548640" y="1280160"/>
+            <a:ext cx="5486400" cy="411480"/>
           </a:xfrm>
           <a:prstGeom prst="rect">
             <a:avLst/>
@@ -5461,14 +5441,14 @@
               <a:buNone/>
             </a:pPr>
             <a:r>
-              <a:rPr lang="en-US" sz="2000" b="1" dirty="0">
+              <a:rPr lang="en-US" sz="2200" b="1" dirty="0">
                 <a:solidFill>
                   <a:srgbClr val="7B3A8E"/>
                 </a:solidFill>
               </a:rPr>
               <a:t>Today I can ...</a:t>
             </a:r>
-            <a:endParaRPr lang="en-US" sz="2000" dirty="0"/>
+            <a:endParaRPr lang="en-US" sz="2200" dirty="0"/>
           </a:p>
         </p:txBody>
       </p:sp>
@@ -5480,8 +5460,8 @@
         </p:nvSpPr>
         <p:spPr>
           <a:xfrm>
-            <a:off x="594360" y="1947672"/>
-            <a:ext cx="292608" cy="292608"/>
+            <a:off x="594360" y="1810512"/>
+            <a:ext cx="310896" cy="310896"/>
           </a:xfrm>
           <a:prstGeom prst="rect">
             <a:avLst/>
@@ -5505,8 +5485,8 @@
         </p:nvSpPr>
         <p:spPr>
           <a:xfrm>
-            <a:off x="1051560" y="1874520"/>
-            <a:ext cx="5120640" cy="868680"/>
+            <a:off x="1097280" y="1737360"/>
+            <a:ext cx="10332720" cy="868680"/>
           </a:xfrm>
           <a:prstGeom prst="rect">
             <a:avLst/>
@@ -5515,23 +5495,21 @@
           <a:ln/>
         </p:spPr>
         <p:txBody>
-          <a:bodyPr wrap="square" lIns="0" tIns="0" rIns="0" bIns="0" rtlCol="0" anchor="t">
-            <a:normAutofit/>
-          </a:bodyPr>
+          <a:bodyPr wrap="square" lIns="0" tIns="0" rIns="0" bIns="0" rtlCol="0" anchor="t"/>
           <a:lstStyle/>
           <a:p>
             <a:pPr indent="0" marL="0">
               <a:buNone/>
             </a:pPr>
             <a:r>
-              <a:rPr lang="en-US" sz="1600" dirty="0">
+              <a:rPr lang="en-US" sz="2000" dirty="0">
                 <a:solidFill>
                   <a:srgbClr val="141B26"/>
                 </a:solidFill>
               </a:rPr>
               <a:t>I can describe how plants use glucose to make starch, cellulose, lipids and proteins, and explain why nitrates are needed.</a:t>
             </a:r>
-            <a:endParaRPr lang="en-US" sz="1600" dirty="0"/>
+            <a:endParaRPr lang="en-US" sz="2000" dirty="0"/>
           </a:p>
         </p:txBody>
       </p:sp>
@@ -5543,8 +5521,8 @@
         </p:nvSpPr>
         <p:spPr>
           <a:xfrm>
-            <a:off x="594360" y="2907792"/>
-            <a:ext cx="292608" cy="292608"/>
+            <a:off x="594360" y="2679192"/>
+            <a:ext cx="310896" cy="310896"/>
           </a:xfrm>
           <a:prstGeom prst="rect">
             <a:avLst/>
@@ -5568,8 +5546,8 @@
         </p:nvSpPr>
         <p:spPr>
           <a:xfrm>
-            <a:off x="1051560" y="2834640"/>
-            <a:ext cx="5120640" cy="868680"/>
+            <a:off x="1097280" y="2606040"/>
+            <a:ext cx="10332720" cy="868680"/>
           </a:xfrm>
           <a:prstGeom prst="rect">
             <a:avLst/>
@@ -5578,23 +5556,21 @@
           <a:ln/>
         </p:spPr>
         <p:txBody>
-          <a:bodyPr wrap="square" lIns="0" tIns="0" rIns="0" bIns="0" rtlCol="0" anchor="t">
-            <a:normAutofit/>
-          </a:bodyPr>
+          <a:bodyPr wrap="square" lIns="0" tIns="0" rIns="0" bIns="0" rtlCol="0" anchor="t"/>
           <a:lstStyle/>
           <a:p>
             <a:pPr indent="0" marL="0">
               <a:buNone/>
             </a:pPr>
             <a:r>
-              <a:rPr lang="en-US" sz="1600" dirty="0">
+              <a:rPr lang="en-US" sz="2000" dirty="0">
                 <a:solidFill>
                   <a:srgbClr val="141B26"/>
                 </a:solidFill>
               </a:rPr>
               <a:t>I can test a leaf for starch and explain what happens when a seed germinates.</a:t>
             </a:r>
-            <a:endParaRPr lang="en-US" sz="1600" dirty="0"/>
+            <a:endParaRPr lang="en-US" sz="2000" dirty="0"/>
           </a:p>
         </p:txBody>
       </p:sp>
@@ -5606,8 +5582,8 @@
         </p:nvSpPr>
         <p:spPr>
           <a:xfrm>
-            <a:off x="6583680" y="1325880"/>
-            <a:ext cx="5029200" cy="457200"/>
+            <a:off x="548640" y="3611880"/>
+            <a:ext cx="5486400" cy="411480"/>
           </a:xfrm>
           <a:prstGeom prst="rect">
             <a:avLst/>
@@ -5623,14 +5599,14 @@
               <a:buNone/>
             </a:pPr>
             <a:r>
-              <a:rPr lang="en-US" sz="2000" b="1" dirty="0">
+              <a:rPr lang="en-US" sz="2200" b="1" dirty="0">
                 <a:solidFill>
                   <a:srgbClr val="7B3A8E"/>
                 </a:solidFill>
               </a:rPr>
               <a:t>Key words today</a:t>
             </a:r>
-            <a:endParaRPr lang="en-US" sz="2000" dirty="0"/>
+            <a:endParaRPr lang="en-US" sz="2200" dirty="0"/>
           </a:p>
         </p:txBody>
       </p:sp>
@@ -5642,8 +5618,8 @@
         </p:nvSpPr>
         <p:spPr>
           <a:xfrm>
-            <a:off x="6583680" y="1874520"/>
-            <a:ext cx="5029200" cy="4023360"/>
+            <a:off x="548640" y="4069080"/>
+            <a:ext cx="3515258" cy="1920240"/>
           </a:xfrm>
           <a:prstGeom prst="rect">
             <a:avLst/>
@@ -5652,350 +5628,285 @@
           <a:ln/>
         </p:spPr>
         <p:txBody>
-          <a:bodyPr wrap="square" lIns="0" tIns="0" rIns="0" bIns="0" rtlCol="0" anchor="t">
-            <a:normAutofit/>
-          </a:bodyPr>
+          <a:bodyPr wrap="square" lIns="0" tIns="0" rIns="0" bIns="0" rtlCol="0" anchor="t"/>
+          <a:lstStyle/>
+          <a:p>
+            <a:pPr marL="304800" indent="-304800">
+              <a:spcAft>
+                <a:spcPts val="600"/>
+              </a:spcAft>
+              <a:buSzPct val="100000"/>
+              <a:buChar char="•"/>
+            </a:pPr>
+            <a:r>
+              <a:rPr lang="en-US" sz="2100" b="1" dirty="0">
+                <a:solidFill>
+                  <a:srgbClr val="0F2A5F"/>
+                </a:solidFill>
+              </a:rPr>
+              <a:t>starch</a:t>
+            </a:r>
+            <a:endParaRPr lang="en-US" sz="2100" dirty="0"/>
+          </a:p>
+          <a:p>
+            <a:pPr marL="304800" indent="-304800">
+              <a:spcAft>
+                <a:spcPts val="600"/>
+              </a:spcAft>
+              <a:buSzPct val="100000"/>
+              <a:buChar char="•"/>
+            </a:pPr>
+            <a:r>
+              <a:rPr lang="en-US" sz="2100" b="1" dirty="0">
+                <a:solidFill>
+                  <a:srgbClr val="0F2A5F"/>
+                </a:solidFill>
+              </a:rPr>
+              <a:t>polymer</a:t>
+            </a:r>
+            <a:endParaRPr lang="en-US" sz="2100" dirty="0"/>
+          </a:p>
+          <a:p>
+            <a:pPr marL="304800" indent="-304800">
+              <a:spcAft>
+                <a:spcPts val="600"/>
+              </a:spcAft>
+              <a:buSzPct val="100000"/>
+              <a:buChar char="•"/>
+            </a:pPr>
+            <a:r>
+              <a:rPr lang="en-US" sz="2100" b="1" dirty="0">
+                <a:solidFill>
+                  <a:srgbClr val="0F2A5F"/>
+                </a:solidFill>
+              </a:rPr>
+              <a:t>cellulose</a:t>
+            </a:r>
+            <a:endParaRPr lang="en-US" sz="2100" dirty="0"/>
+          </a:p>
+          <a:p>
+            <a:pPr marL="304800" indent="-304800">
+              <a:spcAft>
+                <a:spcPts val="600"/>
+              </a:spcAft>
+              <a:buSzPct val="100000"/>
+              <a:buChar char="•"/>
+            </a:pPr>
+            <a:r>
+              <a:rPr lang="en-US" sz="2100" b="1" dirty="0">
+                <a:solidFill>
+                  <a:srgbClr val="0F2A5F"/>
+                </a:solidFill>
+              </a:rPr>
+              <a:t>lipid</a:t>
+            </a:r>
+            <a:endParaRPr lang="en-US" sz="2100" dirty="0"/>
+          </a:p>
+        </p:txBody>
+      </p:sp>
+      <p:sp>
+        <p:nvSpPr>
+          <p:cNvPr id="12" name="Text 10"/>
+          <p:cNvSpPr txBox="1"/>
+          <p:nvPr/>
+        </p:nvSpPr>
+        <p:spPr>
+          <a:xfrm>
+            <a:off x="4338218" y="4069080"/>
+            <a:ext cx="3515258" cy="1920240"/>
+          </a:xfrm>
+          <a:prstGeom prst="rect">
+            <a:avLst/>
+          </a:prstGeom>
+          <a:noFill/>
+          <a:ln/>
+        </p:spPr>
+        <p:txBody>
+          <a:bodyPr wrap="square" lIns="0" tIns="0" rIns="0" bIns="0" rtlCol="0" anchor="t"/>
+          <a:lstStyle/>
+          <a:p>
+            <a:pPr marL="304800" indent="-304800">
+              <a:spcAft>
+                <a:spcPts val="600"/>
+              </a:spcAft>
+              <a:buSzPct val="100000"/>
+              <a:buChar char="•"/>
+            </a:pPr>
+            <a:r>
+              <a:rPr lang="en-US" sz="2100" b="1" dirty="0">
+                <a:solidFill>
+                  <a:srgbClr val="0F2A5F"/>
+                </a:solidFill>
+              </a:rPr>
+              <a:t>protein</a:t>
+            </a:r>
+            <a:endParaRPr lang="en-US" sz="2100" dirty="0"/>
+          </a:p>
+          <a:p>
+            <a:pPr marL="304800" indent="-304800">
+              <a:spcAft>
+                <a:spcPts val="600"/>
+              </a:spcAft>
+              <a:buSzPct val="100000"/>
+              <a:buChar char="•"/>
+            </a:pPr>
+            <a:r>
+              <a:rPr lang="en-US" sz="2100" b="1" dirty="0">
+                <a:solidFill>
+                  <a:srgbClr val="0F2A5F"/>
+                </a:solidFill>
+              </a:rPr>
+              <a:t>amino acid</a:t>
+            </a:r>
+            <a:endParaRPr lang="en-US" sz="2100" dirty="0"/>
+          </a:p>
+          <a:p>
+            <a:pPr marL="304800" indent="-304800">
+              <a:spcAft>
+                <a:spcPts val="600"/>
+              </a:spcAft>
+              <a:buSzPct val="100000"/>
+              <a:buChar char="•"/>
+            </a:pPr>
+            <a:r>
+              <a:rPr lang="en-US" sz="2100" b="1" dirty="0">
+                <a:solidFill>
+                  <a:srgbClr val="0F2A5F"/>
+                </a:solidFill>
+              </a:rPr>
+              <a:t>enzyme</a:t>
+            </a:r>
+            <a:endParaRPr lang="en-US" sz="2100" dirty="0"/>
+          </a:p>
+          <a:p>
+            <a:pPr marL="304800" indent="-304800">
+              <a:spcAft>
+                <a:spcPts val="600"/>
+              </a:spcAft>
+              <a:buSzPct val="100000"/>
+              <a:buChar char="•"/>
+            </a:pPr>
+            <a:r>
+              <a:rPr lang="en-US" sz="2100" b="1" dirty="0">
+                <a:solidFill>
+                  <a:srgbClr val="0F2A5F"/>
+                </a:solidFill>
+              </a:rPr>
+              <a:t>nitrate</a:t>
+            </a:r>
+            <a:endParaRPr lang="en-US" sz="2100" dirty="0"/>
+          </a:p>
+        </p:txBody>
+      </p:sp>
+      <p:sp>
+        <p:nvSpPr>
+          <p:cNvPr id="13" name="Text 11"/>
+          <p:cNvSpPr txBox="1"/>
+          <p:nvPr/>
+        </p:nvSpPr>
+        <p:spPr>
+          <a:xfrm>
+            <a:off x="8127797" y="4069080"/>
+            <a:ext cx="3515258" cy="1920240"/>
+          </a:xfrm>
+          <a:prstGeom prst="rect">
+            <a:avLst/>
+          </a:prstGeom>
+          <a:noFill/>
+          <a:ln/>
+        </p:spPr>
+        <p:txBody>
+          <a:bodyPr wrap="square" lIns="0" tIns="0" rIns="0" bIns="0" rtlCol="0" anchor="t"/>
+          <a:lstStyle/>
+          <a:p>
+            <a:pPr marL="304800" indent="-304800">
+              <a:spcAft>
+                <a:spcPts val="600"/>
+              </a:spcAft>
+              <a:buSzPct val="100000"/>
+              <a:buChar char="•"/>
+            </a:pPr>
+            <a:r>
+              <a:rPr lang="en-US" sz="2200" b="1" dirty="0">
+                <a:solidFill>
+                  <a:srgbClr val="0F2A5F"/>
+                </a:solidFill>
+              </a:rPr>
+              <a:t>germination</a:t>
+            </a:r>
+            <a:endParaRPr lang="en-US" sz="2200" dirty="0"/>
+          </a:p>
+          <a:p>
+            <a:pPr marL="304800" indent="-304800">
+              <a:spcAft>
+                <a:spcPts val="600"/>
+              </a:spcAft>
+              <a:buSzPct val="100000"/>
+              <a:buChar char="•"/>
+            </a:pPr>
+            <a:r>
+              <a:rPr lang="en-US" sz="2200" b="1" dirty="0">
+                <a:solidFill>
+                  <a:srgbClr val="0F2A5F"/>
+                </a:solidFill>
+              </a:rPr>
+              <a:t>iodine solution</a:t>
+            </a:r>
+            <a:endParaRPr lang="en-US" sz="2200" dirty="0"/>
+          </a:p>
+          <a:p>
+            <a:pPr marL="304800" indent="-304800">
+              <a:spcAft>
+                <a:spcPts val="600"/>
+              </a:spcAft>
+              <a:buSzPct val="100000"/>
+              <a:buChar char="•"/>
+            </a:pPr>
+            <a:r>
+              <a:rPr lang="en-US" sz="2200" b="1" dirty="0">
+                <a:solidFill>
+                  <a:srgbClr val="0F2A5F"/>
+                </a:solidFill>
+              </a:rPr>
+              <a:t>Benedict's solution</a:t>
+            </a:r>
+            <a:endParaRPr lang="en-US" sz="2200" dirty="0"/>
+          </a:p>
+        </p:txBody>
+      </p:sp>
+      <p:sp>
+        <p:nvSpPr>
+          <p:cNvPr id="14" name="Text 12"/>
+          <p:cNvSpPr txBox="1"/>
+          <p:nvPr/>
+        </p:nvSpPr>
+        <p:spPr>
+          <a:xfrm>
+            <a:off x="548640" y="6035040"/>
+            <a:ext cx="10881360" cy="320040"/>
+          </a:xfrm>
+          <a:prstGeom prst="rect">
+            <a:avLst/>
+          </a:prstGeom>
+          <a:noFill/>
+          <a:ln/>
+        </p:spPr>
+        <p:txBody>
+          <a:bodyPr wrap="square" lIns="0" tIns="0" rIns="0" bIns="0" rtlCol="0" anchor="ctr"/>
           <a:lstStyle/>
           <a:p>
             <a:pPr indent="0" marL="0">
-              <a:spcAft>
-                <a:spcPts val="500"/>
-              </a:spcAft>
-              <a:buNone/>
-            </a:pPr>
-            <a:r>
-              <a:rPr lang="en-US" sz="1300" b="1" dirty="0">
-                <a:solidFill>
-                  <a:srgbClr val="0F2A5F"/>
-                </a:solidFill>
-              </a:rPr>
-              <a:t>starch</a:t>
-            </a:r>
-            <a:pPr indent="0" marL="0">
-              <a:spcAft>
-                <a:spcPts val="500"/>
-              </a:spcAft>
-              <a:buNone/>
-            </a:pPr>
-            <a:r>
-              <a:rPr lang="en-US" sz="1300" dirty="0">
-                <a:solidFill>
-                  <a:srgbClr val="141B26"/>
-                </a:solidFill>
-              </a:rPr>
-              <a:t>  a polymer made of many glucose molecules joined together; a plant's energy store</a:t>
-            </a:r>
-            <a:endParaRPr lang="en-US" sz="1300" dirty="0"/>
-          </a:p>
-          <a:p>
-            <a:pPr indent="0" marL="0">
-              <a:spcAft>
-                <a:spcPts val="500"/>
-              </a:spcAft>
-              <a:buNone/>
-            </a:pPr>
-            <a:r>
-              <a:rPr lang="en-US" sz="1300" b="1" dirty="0">
-                <a:solidFill>
-                  <a:srgbClr val="0F2A5F"/>
-                </a:solidFill>
-              </a:rPr>
-              <a:t>polymer</a:t>
-            </a:r>
-            <a:pPr indent="0" marL="0">
-              <a:spcAft>
-                <a:spcPts val="500"/>
-              </a:spcAft>
-              <a:buNone/>
-            </a:pPr>
-            <a:r>
-              <a:rPr lang="en-US" sz="1300" dirty="0">
-                <a:solidFill>
-                  <a:srgbClr val="141B26"/>
-                </a:solidFill>
-              </a:rPr>
-              <a:t>  a long molecule made of many small molecules joined in a chain</a:t>
-            </a:r>
-            <a:endParaRPr lang="en-US" sz="1300" dirty="0"/>
-          </a:p>
-          <a:p>
-            <a:pPr indent="0" marL="0">
-              <a:spcAft>
-                <a:spcPts val="500"/>
-              </a:spcAft>
-              <a:buNone/>
-            </a:pPr>
-            <a:r>
-              <a:rPr lang="en-US" sz="1300" b="1" dirty="0">
-                <a:solidFill>
-                  <a:srgbClr val="0F2A5F"/>
-                </a:solidFill>
-              </a:rPr>
-              <a:t>cellulose</a:t>
-            </a:r>
-            <a:pPr indent="0" marL="0">
-              <a:spcAft>
-                <a:spcPts val="500"/>
-              </a:spcAft>
-              <a:buNone/>
-            </a:pPr>
-            <a:r>
-              <a:rPr lang="en-US" sz="1300" dirty="0">
-                <a:solidFill>
-                  <a:srgbClr val="141B26"/>
-                </a:solidFill>
-              </a:rPr>
-              <a:t>  a polymer of glucose used to make plant cell walls</a:t>
-            </a:r>
-            <a:endParaRPr lang="en-US" sz="1300" dirty="0"/>
-          </a:p>
-          <a:p>
-            <a:pPr indent="0" marL="0">
-              <a:spcAft>
-                <a:spcPts val="500"/>
-              </a:spcAft>
-              <a:buNone/>
-            </a:pPr>
-            <a:r>
-              <a:rPr lang="en-US" sz="1300" b="1" dirty="0">
-                <a:solidFill>
-                  <a:srgbClr val="0F2A5F"/>
-                </a:solidFill>
-              </a:rPr>
-              <a:t>lipid</a:t>
-            </a:r>
-            <a:pPr indent="0" marL="0">
-              <a:spcAft>
-                <a:spcPts val="500"/>
-              </a:spcAft>
-              <a:buNone/>
-            </a:pPr>
-            <a:r>
-              <a:rPr lang="en-US" sz="1300" dirty="0">
-                <a:solidFill>
-                  <a:srgbClr val="141B26"/>
-                </a:solidFill>
-              </a:rPr>
-              <a:t>  a fat or oil; insoluble in water</a:t>
-            </a:r>
-            <a:endParaRPr lang="en-US" sz="1300" dirty="0"/>
-          </a:p>
-          <a:p>
-            <a:pPr indent="0" marL="0">
-              <a:spcAft>
-                <a:spcPts val="500"/>
-              </a:spcAft>
-              <a:buNone/>
-            </a:pPr>
-            <a:r>
-              <a:rPr lang="en-US" sz="1300" b="1" dirty="0">
-                <a:solidFill>
-                  <a:srgbClr val="0F2A5F"/>
-                </a:solidFill>
-              </a:rPr>
-              <a:t>protein</a:t>
-            </a:r>
-            <a:pPr indent="0" marL="0">
-              <a:spcAft>
-                <a:spcPts val="500"/>
-              </a:spcAft>
-              <a:buNone/>
-            </a:pPr>
-            <a:r>
-              <a:rPr lang="en-US" sz="1300" dirty="0">
-                <a:solidFill>
-                  <a:srgbClr val="141B26"/>
-                </a:solidFill>
-              </a:rPr>
-              <a:t>  a polymer made of amino acids; enzymes are proteins</a:t>
-            </a:r>
-            <a:endParaRPr lang="en-US" sz="1300" dirty="0"/>
-          </a:p>
-          <a:p>
-            <a:pPr indent="0" marL="0">
-              <a:spcAft>
-                <a:spcPts val="500"/>
-              </a:spcAft>
-              <a:buNone/>
-            </a:pPr>
-            <a:r>
-              <a:rPr lang="en-US" sz="1300" b="1" dirty="0">
-                <a:solidFill>
-                  <a:srgbClr val="0F2A5F"/>
-                </a:solidFill>
-              </a:rPr>
-              <a:t>amino acid</a:t>
-            </a:r>
-            <a:pPr indent="0" marL="0">
-              <a:spcAft>
-                <a:spcPts val="500"/>
-              </a:spcAft>
-              <a:buNone/>
-            </a:pPr>
-            <a:r>
-              <a:rPr lang="en-US" sz="1300" dirty="0">
-                <a:solidFill>
-                  <a:srgbClr val="141B26"/>
-                </a:solidFill>
-              </a:rPr>
-              <a:t>  a small molecule that proteins are built from; needs nitrogen</a:t>
-            </a:r>
-            <a:endParaRPr lang="en-US" sz="1300" dirty="0"/>
-          </a:p>
-          <a:p>
-            <a:pPr indent="0" marL="0">
-              <a:spcAft>
-                <a:spcPts val="500"/>
-              </a:spcAft>
-              <a:buNone/>
-            </a:pPr>
-            <a:r>
-              <a:rPr lang="en-US" sz="1300" b="1" dirty="0">
-                <a:solidFill>
-                  <a:srgbClr val="0F2A5F"/>
-                </a:solidFill>
-              </a:rPr>
-              <a:t>enzyme</a:t>
-            </a:r>
-            <a:pPr indent="0" marL="0">
-              <a:spcAft>
-                <a:spcPts val="500"/>
-              </a:spcAft>
-              <a:buNone/>
-            </a:pPr>
-            <a:r>
-              <a:rPr lang="en-US" sz="1300" dirty="0">
-                <a:solidFill>
-                  <a:srgbClr val="141B26"/>
-                </a:solidFill>
-              </a:rPr>
-              <a:t>  a protein that speeds up a reaction in a living thing</a:t>
-            </a:r>
-            <a:endParaRPr lang="en-US" sz="1300" dirty="0"/>
-          </a:p>
-          <a:p>
-            <a:pPr indent="0" marL="0">
-              <a:spcAft>
-                <a:spcPts val="500"/>
-              </a:spcAft>
-              <a:buNone/>
-            </a:pPr>
-            <a:r>
-              <a:rPr lang="en-US" sz="1300" b="1" dirty="0">
-                <a:solidFill>
-                  <a:srgbClr val="0F2A5F"/>
-                </a:solidFill>
-              </a:rPr>
-              <a:t>nitrate</a:t>
-            </a:r>
-            <a:pPr indent="0" marL="0">
-              <a:spcAft>
-                <a:spcPts val="500"/>
-              </a:spcAft>
-              <a:buNone/>
-            </a:pPr>
-            <a:r>
-              <a:rPr lang="en-US" sz="1300" dirty="0">
-                <a:solidFill>
-                  <a:srgbClr val="141B26"/>
-                </a:solidFill>
-              </a:rPr>
-              <a:t>  a mineral salt that supplies nitrogen for making amino acids</a:t>
-            </a:r>
-            <a:endParaRPr lang="en-US" sz="1300" dirty="0"/>
-          </a:p>
-          <a:p>
-            <a:pPr indent="0" marL="0">
-              <a:spcAft>
-                <a:spcPts val="500"/>
-              </a:spcAft>
-              <a:buNone/>
-            </a:pPr>
-            <a:r>
-              <a:rPr lang="en-US" sz="1300" b="1" dirty="0">
-                <a:solidFill>
-                  <a:srgbClr val="0F2A5F"/>
-                </a:solidFill>
-              </a:rPr>
-              <a:t>germination</a:t>
-            </a:r>
-            <a:pPr indent="0" marL="0">
-              <a:spcAft>
-                <a:spcPts val="500"/>
-              </a:spcAft>
-              <a:buNone/>
-            </a:pPr>
-            <a:r>
-              <a:rPr lang="en-US" sz="1300" dirty="0">
-                <a:solidFill>
-                  <a:srgbClr val="141B26"/>
-                </a:solidFill>
-              </a:rPr>
-              <a:t>  when a seed starts to grow into a seedling</a:t>
-            </a:r>
-            <a:endParaRPr lang="en-US" sz="1300" dirty="0"/>
-          </a:p>
-          <a:p>
-            <a:pPr indent="0" marL="0">
-              <a:spcAft>
-                <a:spcPts val="500"/>
-              </a:spcAft>
-              <a:buNone/>
-            </a:pPr>
-            <a:r>
-              <a:rPr lang="en-US" sz="1300" b="1" dirty="0">
-                <a:solidFill>
-                  <a:srgbClr val="0F2A5F"/>
-                </a:solidFill>
-              </a:rPr>
-              <a:t>iodine solution</a:t>
-            </a:r>
-            <a:pPr indent="0" marL="0">
-              <a:spcAft>
-                <a:spcPts val="500"/>
-              </a:spcAft>
-              <a:buNone/>
-            </a:pPr>
-            <a:r>
-              <a:rPr lang="en-US" sz="1300" dirty="0">
-                <a:solidFill>
-                  <a:srgbClr val="141B26"/>
-                </a:solidFill>
-              </a:rPr>
-              <a:t>  an orange-brown liquid that turns blue-black with starch</a:t>
-            </a:r>
-            <a:endParaRPr lang="en-US" sz="1300" dirty="0"/>
-          </a:p>
-          <a:p>
-            <a:pPr indent="0" marL="0">
-              <a:spcAft>
-                <a:spcPts val="500"/>
-              </a:spcAft>
-              <a:buNone/>
-            </a:pPr>
-            <a:r>
-              <a:rPr lang="en-US" sz="1300" b="1" dirty="0">
-                <a:solidFill>
-                  <a:srgbClr val="0F2A5F"/>
-                </a:solidFill>
-              </a:rPr>
-              <a:t>Benedict's solution</a:t>
-            </a:r>
-            <a:pPr indent="0" marL="0">
-              <a:spcAft>
-                <a:spcPts val="500"/>
-              </a:spcAft>
-              <a:buNone/>
-            </a:pPr>
-            <a:r>
-              <a:rPr lang="en-US" sz="1300" dirty="0">
-                <a:solidFill>
-                  <a:srgbClr val="141B26"/>
-                </a:solidFill>
-              </a:rPr>
-              <a:t>  a blue liquid that turns orange-red when heated with glucose</a:t>
-            </a:r>
-            <a:endParaRPr lang="en-US" sz="1300" dirty="0"/>
+              <a:buNone/>
+            </a:pPr>
+            <a:r>
+              <a:rPr lang="en-US" sz="1400" i="1" dirty="0">
+                <a:solidFill>
+                  <a:srgbClr val="5B6574"/>
+                </a:solidFill>
+              </a:rPr>
+              <a:t>Meanings are in the key words box on your worksheet.</a:t>
+            </a:r>
+            <a:endParaRPr lang="en-US" sz="1400" dirty="0"/>
           </a:p>
         </p:txBody>
       </p:sp>
@@ -6179,7 +6090,7 @@
         <p:spPr>
           <a:xfrm>
             <a:off x="548640" y="1371600"/>
-            <a:ext cx="5394960" cy="2377440"/>
+            <a:ext cx="5394960" cy="2651760"/>
           </a:xfrm>
           <a:prstGeom prst="rect">
             <a:avLst/>
@@ -6188,23 +6099,21 @@
           <a:ln/>
         </p:spPr>
         <p:txBody>
-          <a:bodyPr wrap="square" lIns="0" tIns="0" rIns="0" bIns="0" rtlCol="0" anchor="t">
-            <a:normAutofit/>
-          </a:bodyPr>
+          <a:bodyPr wrap="square" lIns="0" tIns="0" rIns="0" bIns="0" rtlCol="0" anchor="t"/>
           <a:lstStyle/>
           <a:p>
             <a:pPr indent="0" marL="0">
               <a:buNone/>
             </a:pPr>
             <a:r>
-              <a:rPr lang="en-US" sz="2800" b="1" dirty="0">
+              <a:rPr lang="en-US" sz="2400" b="1" dirty="0">
                 <a:solidFill>
                   <a:srgbClr val="0F2A5F"/>
                 </a:solidFill>
               </a:rPr>
               <a:t>The wood of a tree, the oil in a sunflower seed, the protein in a bean, the starch in a potato: all of it was built from glucose made in photosynthesis. How can one sugar become so many different things?</a:t>
             </a:r>
-            <a:endParaRPr lang="en-US" sz="2800" dirty="0"/>
+            <a:endParaRPr lang="en-US" sz="2400" dirty="0"/>
           </a:p>
         </p:txBody>
       </p:sp>
@@ -6216,8 +6125,8 @@
         </p:nvSpPr>
         <p:spPr>
           <a:xfrm>
-            <a:off x="548640" y="3794760"/>
-            <a:ext cx="5394960" cy="2103120"/>
+            <a:off x="548640" y="4114800"/>
+            <a:ext cx="5394960" cy="1828800"/>
           </a:xfrm>
           <a:prstGeom prst="rect">
             <a:avLst/>
@@ -6226,9 +6135,7 @@
           <a:ln/>
         </p:spPr>
         <p:txBody>
-          <a:bodyPr wrap="square" lIns="0" tIns="0" rIns="0" bIns="0" rtlCol="0" anchor="t">
-            <a:normAutofit/>
-          </a:bodyPr>
+          <a:bodyPr wrap="square" lIns="0" tIns="0" rIns="0" bIns="0" rtlCol="0" anchor="t"/>
           <a:lstStyle/>
           <a:p>
             <a:pPr indent="0" marL="0">
@@ -6238,14 +6145,14 @@
               <a:buNone/>
             </a:pPr>
             <a:r>
-              <a:rPr lang="en-US" sz="1600" dirty="0">
+              <a:rPr lang="en-US" sz="2000" dirty="0">
                 <a:solidFill>
                   <a:srgbClr val="141B26"/>
                 </a:solidFill>
               </a:rPr>
               <a:t>Talk to a partner: what else does the plant need, apart from glucose?</a:t>
             </a:r>
-            <a:endParaRPr lang="en-US" sz="1600" dirty="0"/>
+            <a:endParaRPr lang="en-US" sz="2000" dirty="0"/>
           </a:p>
         </p:txBody>
       </p:sp>
@@ -6282,7 +6189,7 @@
         <p:spPr>
           <a:xfrm>
             <a:off x="6309360" y="5532120"/>
-            <a:ext cx="5303520" cy="502920"/>
+            <a:ext cx="5303520" cy="548640"/>
           </a:xfrm>
           <a:prstGeom prst="rect">
             <a:avLst/>
@@ -6298,7 +6205,7 @@
               <a:buNone/>
             </a:pPr>
             <a:r>
-              <a:rPr lang="en-US" sz="1100" dirty="0">
+              <a:rPr lang="en-US" sz="1300" dirty="0">
                 <a:solidFill>
                   <a:srgbClr val="141B26"/>
                 </a:solidFill>
@@ -6308,21 +6215,21 @@
             <a:pPr algn="l" indent="0" marL="0">
               <a:buNone/>
             </a:pPr>
-            <a:endParaRPr lang="en-US" sz="1100" dirty="0"/>
+            <a:endParaRPr lang="en-US" sz="1300" dirty="0"/>
           </a:p>
           <a:p>
             <a:pPr algn="l" indent="0" marL="0">
               <a:buNone/>
             </a:pPr>
             <a:r>
-              <a:rPr lang="en-US" sz="800" dirty="0">
+              <a:rPr lang="en-US" sz="900" dirty="0">
                 <a:solidFill>
                   <a:srgbClr val="5B6574"/>
                 </a:solidFill>
               </a:rPr>
               <a:t>Image: unknown, CC0, via Wikimedia Commons</a:t>
             </a:r>
-            <a:endParaRPr lang="en-US" sz="1100" dirty="0"/>
+            <a:endParaRPr lang="en-US" sz="1300" dirty="0"/>
           </a:p>
         </p:txBody>
       </p:sp>
@@ -6505,8 +6412,8 @@
         </p:nvSpPr>
         <p:spPr>
           <a:xfrm>
-            <a:off x="548640" y="6053328"/>
-            <a:ext cx="9601200" cy="292608"/>
+            <a:off x="548640" y="6035040"/>
+            <a:ext cx="9601200" cy="310896"/>
           </a:xfrm>
           <a:prstGeom prst="rect">
             <a:avLst/>
@@ -6522,7 +6429,7 @@
               <a:buNone/>
             </a:pPr>
             <a:r>
-              <a:rPr lang="en-US" sz="1200" b="1" dirty="0">
+              <a:rPr lang="en-US" sz="1400" b="1" dirty="0">
                 <a:solidFill>
                   <a:srgbClr val="7B3A8E"/>
                 </a:solidFill>
@@ -6533,14 +6440,14 @@
               <a:buNone/>
             </a:pPr>
             <a:r>
-              <a:rPr lang="en-US" sz="1200" dirty="0">
+              <a:rPr lang="en-US" sz="1400" dirty="0">
                 <a:solidFill>
                   <a:srgbClr val="7B3A8E"/>
                 </a:solidFill>
               </a:rPr>
               <a:t>starch   ·   polymer   ·   cellulose</a:t>
             </a:r>
-            <a:endParaRPr lang="en-US" sz="1200" dirty="0"/>
+            <a:endParaRPr lang="en-US" sz="1400" dirty="0"/>
           </a:p>
         </p:txBody>
       </p:sp>
@@ -6562,81 +6469,79 @@
           <a:ln/>
         </p:spPr>
         <p:txBody>
-          <a:bodyPr wrap="square" lIns="0" tIns="0" rIns="0" bIns="0" rtlCol="0" anchor="t">
-            <a:normAutofit/>
-          </a:bodyPr>
-          <a:lstStyle/>
-          <a:p>
-            <a:pPr marL="228600" indent="-228600">
+          <a:bodyPr wrap="square" lIns="0" tIns="0" rIns="0" bIns="0" rtlCol="0" anchor="t"/>
+          <a:lstStyle/>
+          <a:p>
+            <a:pPr marL="304800" indent="-304800">
               <a:spcAft>
-                <a:spcPts val="600"/>
+                <a:spcPts val="800"/>
               </a:spcAft>
               <a:buSzPct val="100000"/>
               <a:buChar char="•"/>
             </a:pPr>
             <a:r>
-              <a:rPr lang="en-US" sz="1700" dirty="0">
+              <a:rPr lang="en-US" sz="2000" dirty="0">
                 <a:solidFill>
                   <a:srgbClr val="141B26"/>
                 </a:solidFill>
               </a:rPr>
               <a:t>Glucose molecules are linked together to form starch, a polymer.</a:t>
             </a:r>
-            <a:endParaRPr lang="en-US" sz="1700" dirty="0"/>
-          </a:p>
-          <a:p>
-            <a:pPr marL="228600" indent="-228600">
+            <a:endParaRPr lang="en-US" sz="2000" dirty="0"/>
+          </a:p>
+          <a:p>
+            <a:pPr marL="304800" indent="-304800">
               <a:spcAft>
-                <a:spcPts val="600"/>
+                <a:spcPts val="800"/>
               </a:spcAft>
               <a:buSzPct val="100000"/>
               <a:buChar char="•"/>
             </a:pPr>
             <a:r>
-              <a:rPr lang="en-US" sz="1700" dirty="0">
+              <a:rPr lang="en-US" sz="2000" dirty="0">
                 <a:solidFill>
                   <a:srgbClr val="141B26"/>
                 </a:solidFill>
               </a:rPr>
               <a:t>Starch stays in the chloroplasts until photosynthesis stops, then it is broken down into sugars and carried in the phloem.</a:t>
             </a:r>
-            <a:endParaRPr lang="en-US" sz="1700" dirty="0"/>
-          </a:p>
-          <a:p>
-            <a:pPr marL="228600" indent="-228600">
+            <a:endParaRPr lang="en-US" sz="2000" dirty="0"/>
+          </a:p>
+          <a:p>
+            <a:pPr marL="304800" indent="-304800">
               <a:spcAft>
-                <a:spcPts val="600"/>
+                <a:spcPts val="800"/>
               </a:spcAft>
               <a:buSzPct val="100000"/>
               <a:buChar char="•"/>
             </a:pPr>
             <a:r>
-              <a:rPr lang="en-US" sz="1700" dirty="0">
+              <a:rPr lang="en-US" sz="2000" dirty="0">
                 <a:solidFill>
                   <a:srgbClr val="141B26"/>
                 </a:solidFill>
               </a:rPr>
               <a:t>In storage organs such as potatoes, and in seeds, sugars are turned back into starch.</a:t>
             </a:r>
-            <a:endParaRPr lang="en-US" sz="1700" dirty="0"/>
-          </a:p>
-          <a:p>
-            <a:pPr marL="228600" indent="-228600">
+            <a:endParaRPr lang="en-US" sz="2000" dirty="0"/>
+          </a:p>
+          <a:p>
+            <a:pPr marL="304800" indent="-304800">
               <a:spcAft>
-                <a:spcPts val="600"/>
+                <a:spcPts val="800"/>
               </a:spcAft>
               <a:buSzPct val="100000"/>
               <a:buChar char="•"/>
             </a:pPr>
             <a:r>
-              <a:rPr lang="en-US" sz="1700" dirty="0">
+              <a:rPr lang="en-US" sz="2000" dirty="0">
                 <a:solidFill>
                   <a:srgbClr val="141B26"/>
                 </a:solidFill>
               </a:rPr>
               <a:t>Sugars are also used to make cellulose, the polymer that builds cell walls.</a:t>
             </a:r>
-            <a:endParaRPr lang="en-US" sz="1700" dirty="0"/>
+            <a:endParaRPr lang="en-US" sz="2000" dirty="0"/>
           </a:p>
         </p:txBody>
       </p:sp>
@@ -6683,16 +6588,14 @@
           <a:ln/>
         </p:spPr>
         <p:txBody>
-          <a:bodyPr wrap="square" lIns="0" tIns="0" rIns="0" bIns="0" rtlCol="0" anchor="ctr">
-            <a:normAutofit/>
-          </a:bodyPr>
+          <a:bodyPr wrap="square" lIns="0" tIns="0" rIns="0" bIns="0" rtlCol="0" anchor="ctr"/>
           <a:lstStyle/>
           <a:p>
             <a:pPr indent="0" marL="0">
               <a:buNone/>
             </a:pPr>
             <a:r>
-              <a:rPr lang="en-US" sz="1400" b="1" dirty="0">
+              <a:rPr lang="en-US" sz="1700" b="1" dirty="0">
                 <a:solidFill>
                   <a:srgbClr val="7B3A8E"/>
                 </a:solidFill>
@@ -6703,14 +6606,14 @@
               <a:buNone/>
             </a:pPr>
             <a:r>
-              <a:rPr lang="en-US" sz="1400" dirty="0">
+              <a:rPr lang="en-US" sz="1700" dirty="0">
                 <a:solidFill>
                   <a:srgbClr val="141B26"/>
                 </a:solidFill>
               </a:rPr>
               <a:t>Starch is insoluble, so it is a good store; sugars are soluble, so they can be transported.</a:t>
             </a:r>
-            <a:endParaRPr lang="en-US" sz="1400" dirty="0"/>
+            <a:endParaRPr lang="en-US" sz="1700" dirty="0"/>
           </a:p>
         </p:txBody>
       </p:sp>
@@ -6893,8 +6796,8 @@
         </p:nvSpPr>
         <p:spPr>
           <a:xfrm>
-            <a:off x="548640" y="6053328"/>
-            <a:ext cx="9601200" cy="292608"/>
+            <a:off x="548640" y="6035040"/>
+            <a:ext cx="9601200" cy="310896"/>
           </a:xfrm>
           <a:prstGeom prst="rect">
             <a:avLst/>
@@ -6910,7 +6813,7 @@
               <a:buNone/>
             </a:pPr>
             <a:r>
-              <a:rPr lang="en-US" sz="1200" b="1" dirty="0">
+              <a:rPr lang="en-US" sz="1400" b="1" dirty="0">
                 <a:solidFill>
                   <a:srgbClr val="7B3A8E"/>
                 </a:solidFill>
@@ -6921,14 +6824,14 @@
               <a:buNone/>
             </a:pPr>
             <a:r>
-              <a:rPr lang="en-US" sz="1200" dirty="0">
+              <a:rPr lang="en-US" sz="1400" dirty="0">
                 <a:solidFill>
                   <a:srgbClr val="7B3A8E"/>
                 </a:solidFill>
               </a:rPr>
               <a:t>lipid   ·   protein   ·   amino acid   ·   enzyme   ·   nitrate</a:t>
             </a:r>
-            <a:endParaRPr lang="en-US" sz="1200" dirty="0"/>
+            <a:endParaRPr lang="en-US" sz="1400" dirty="0"/>
           </a:p>
         </p:txBody>
       </p:sp>
@@ -6950,99 +6853,97 @@
           <a:ln/>
         </p:spPr>
         <p:txBody>
-          <a:bodyPr wrap="square" lIns="0" tIns="0" rIns="0" bIns="0" rtlCol="0" anchor="t">
-            <a:normAutofit/>
-          </a:bodyPr>
-          <a:lstStyle/>
-          <a:p>
-            <a:pPr marL="228600" indent="-228600">
+          <a:bodyPr wrap="square" lIns="0" tIns="0" rIns="0" bIns="0" rtlCol="0" anchor="t"/>
+          <a:lstStyle/>
+          <a:p>
+            <a:pPr marL="304800" indent="-304800">
               <a:spcAft>
-                <a:spcPts val="600"/>
+                <a:spcPts val="800"/>
               </a:spcAft>
               <a:buSzPct val="100000"/>
               <a:buChar char="•"/>
             </a:pPr>
             <a:r>
-              <a:rPr lang="en-US" sz="1700" dirty="0">
+              <a:rPr lang="en-US" sz="2000" dirty="0">
                 <a:solidFill>
                   <a:srgbClr val="141B26"/>
                 </a:solidFill>
               </a:rPr>
               <a:t>Lipids are fats and oils. They do not dissolve in water.</a:t>
             </a:r>
-            <a:endParaRPr lang="en-US" sz="1700" dirty="0"/>
-          </a:p>
-          <a:p>
-            <a:pPr marL="228600" indent="-228600">
+            <a:endParaRPr lang="en-US" sz="2000" dirty="0"/>
+          </a:p>
+          <a:p>
+            <a:pPr marL="304800" indent="-304800">
               <a:spcAft>
-                <a:spcPts val="600"/>
+                <a:spcPts val="800"/>
               </a:spcAft>
               <a:buSzPct val="100000"/>
               <a:buChar char="•"/>
             </a:pPr>
             <a:r>
-              <a:rPr lang="en-US" sz="1700" dirty="0">
+              <a:rPr lang="en-US" sz="2000" dirty="0">
                 <a:solidFill>
                   <a:srgbClr val="141B26"/>
                 </a:solidFill>
               </a:rPr>
               <a:t>Plants use lipids for the waterproof cuticle, for cell membranes, and as energy stores in seeds and in fruits such as avocado.</a:t>
             </a:r>
-            <a:endParaRPr lang="en-US" sz="1700" dirty="0"/>
-          </a:p>
-          <a:p>
-            <a:pPr marL="228600" indent="-228600">
+            <a:endParaRPr lang="en-US" sz="2000" dirty="0"/>
+          </a:p>
+          <a:p>
+            <a:pPr marL="304800" indent="-304800">
               <a:spcAft>
-                <a:spcPts val="600"/>
+                <a:spcPts val="800"/>
               </a:spcAft>
               <a:buSzPct val="100000"/>
               <a:buChar char="•"/>
             </a:pPr>
             <a:r>
-              <a:rPr lang="en-US" sz="1700" dirty="0">
+              <a:rPr lang="en-US" sz="2000" dirty="0">
                 <a:solidFill>
                   <a:srgbClr val="141B26"/>
                 </a:solidFill>
               </a:rPr>
               <a:t>Proteins are polymers: long chains of amino acids.</a:t>
             </a:r>
-            <a:endParaRPr lang="en-US" sz="1700" dirty="0"/>
-          </a:p>
-          <a:p>
-            <a:pPr marL="228600" indent="-228600">
+            <a:endParaRPr lang="en-US" sz="2000" dirty="0"/>
+          </a:p>
+          <a:p>
+            <a:pPr marL="304800" indent="-304800">
               <a:spcAft>
-                <a:spcPts val="600"/>
+                <a:spcPts val="800"/>
               </a:spcAft>
               <a:buSzPct val="100000"/>
               <a:buChar char="•"/>
             </a:pPr>
             <a:r>
-              <a:rPr lang="en-US" sz="1700" dirty="0">
+              <a:rPr lang="en-US" sz="2000" dirty="0">
                 <a:solidFill>
                   <a:srgbClr val="141B26"/>
                 </a:solidFill>
               </a:rPr>
               <a:t>To make amino acids a plant needs nitrogen, which comes from nitrates in the soil.</a:t>
             </a:r>
-            <a:endParaRPr lang="en-US" sz="1700" dirty="0"/>
-          </a:p>
-          <a:p>
-            <a:pPr marL="228600" indent="-228600">
+            <a:endParaRPr lang="en-US" sz="2000" dirty="0"/>
+          </a:p>
+          <a:p>
+            <a:pPr marL="304800" indent="-304800">
               <a:spcAft>
-                <a:spcPts val="600"/>
+                <a:spcPts val="800"/>
               </a:spcAft>
               <a:buSzPct val="100000"/>
               <a:buChar char="•"/>
             </a:pPr>
             <a:r>
-              <a:rPr lang="en-US" sz="1700" dirty="0">
+              <a:rPr lang="en-US" sz="2000" dirty="0">
                 <a:solidFill>
                   <a:srgbClr val="141B26"/>
                 </a:solidFill>
               </a:rPr>
               <a:t>All enzymes are proteins, including the enzymes for photosynthesis and respiration.</a:t>
             </a:r>
-            <a:endParaRPr lang="en-US" sz="1700" dirty="0"/>
+            <a:endParaRPr lang="en-US" sz="2000" dirty="0"/>
           </a:p>
         </p:txBody>
       </p:sp>
@@ -7089,16 +6990,14 @@
           <a:ln/>
         </p:spPr>
         <p:txBody>
-          <a:bodyPr wrap="square" lIns="0" tIns="0" rIns="0" bIns="0" rtlCol="0" anchor="ctr">
-            <a:normAutofit/>
-          </a:bodyPr>
+          <a:bodyPr wrap="square" lIns="0" tIns="0" rIns="0" bIns="0" rtlCol="0" anchor="ctr"/>
           <a:lstStyle/>
           <a:p>
             <a:pPr indent="0" marL="0">
               <a:buNone/>
             </a:pPr>
             <a:r>
-              <a:rPr lang="en-US" sz="1400" b="1" dirty="0">
+              <a:rPr lang="en-US" sz="1700" b="1" dirty="0">
                 <a:solidFill>
                   <a:srgbClr val="7B3A8E"/>
                 </a:solidFill>
@@ -7109,14 +7008,14 @@
               <a:buNone/>
             </a:pPr>
             <a:r>
-              <a:rPr lang="en-US" sz="1400" dirty="0">
+              <a:rPr lang="en-US" sz="1700" dirty="0">
                 <a:solidFill>
                   <a:srgbClr val="141B26"/>
                 </a:solidFill>
               </a:rPr>
               <a:t>No nitrates, no amino acids, no proteins, no enzymes: the plant cannot grow.</a:t>
             </a:r>
-            <a:endParaRPr lang="en-US" sz="1400" dirty="0"/>
+            <a:endParaRPr lang="en-US" sz="1700" dirty="0"/>
           </a:p>
         </p:txBody>
       </p:sp>
@@ -7299,8 +7198,8 @@
         </p:nvSpPr>
         <p:spPr>
           <a:xfrm>
-            <a:off x="548640" y="6053328"/>
-            <a:ext cx="9601200" cy="292608"/>
+            <a:off x="548640" y="6035040"/>
+            <a:ext cx="9601200" cy="310896"/>
           </a:xfrm>
           <a:prstGeom prst="rect">
             <a:avLst/>
@@ -7316,7 +7215,7 @@
               <a:buNone/>
             </a:pPr>
             <a:r>
-              <a:rPr lang="en-US" sz="1200" b="1" dirty="0">
+              <a:rPr lang="en-US" sz="1400" b="1" dirty="0">
                 <a:solidFill>
                   <a:srgbClr val="7B3A8E"/>
                 </a:solidFill>
@@ -7327,14 +7226,14 @@
               <a:buNone/>
             </a:pPr>
             <a:r>
-              <a:rPr lang="en-US" sz="1200" dirty="0">
+              <a:rPr lang="en-US" sz="1400" dirty="0">
                 <a:solidFill>
                   <a:srgbClr val="7B3A8E"/>
                 </a:solidFill>
               </a:rPr>
               <a:t>germination   ·   enzyme</a:t>
             </a:r>
-            <a:endParaRPr lang="en-US" sz="1200" dirty="0"/>
+            <a:endParaRPr lang="en-US" sz="1400" dirty="0"/>
           </a:p>
         </p:txBody>
       </p:sp>
@@ -7363,14 +7262,14 @@
               <a:buNone/>
             </a:pPr>
             <a:r>
-              <a:rPr lang="en-US" sz="1600" dirty="0">
+              <a:rPr lang="en-US" sz="1800" dirty="0">
                 <a:solidFill>
                   <a:srgbClr val="141B26"/>
                 </a:solidFill>
               </a:rPr>
               <a:t>A seed stores starch and protein. What has to happen before the embryo can use the store?</a:t>
             </a:r>
-            <a:endParaRPr lang="en-US" sz="1600" dirty="0"/>
+            <a:endParaRPr lang="en-US" sz="1800" dirty="0"/>
           </a:p>
         </p:txBody>
       </p:sp>
@@ -7441,16 +7340,14 @@
           <a:ln/>
         </p:spPr>
         <p:txBody>
-          <a:bodyPr wrap="square" lIns="0" tIns="0" rIns="0" bIns="0" rtlCol="0" anchor="ctr">
-            <a:normAutofit/>
-          </a:bodyPr>
+          <a:bodyPr wrap="square" lIns="0" tIns="0" rIns="0" bIns="0" rtlCol="0" anchor="ctr"/>
           <a:lstStyle/>
           <a:p>
             <a:pPr indent="0" marL="0">
               <a:buNone/>
             </a:pPr>
             <a:r>
-              <a:rPr lang="en-US" sz="1400" b="1" dirty="0">
+              <a:rPr lang="en-US" sz="1700" b="1" dirty="0">
                 <a:solidFill>
                   <a:srgbClr val="7B3A8E"/>
                 </a:solidFill>
@@ -7461,14 +7358,14 @@
               <a:buNone/>
             </a:pPr>
             <a:r>
-              <a:rPr lang="en-US" sz="1400" dirty="0">
+              <a:rPr lang="en-US" sz="1700" dirty="0">
                 <a:solidFill>
                   <a:srgbClr val="141B26"/>
                 </a:solidFill>
               </a:rPr>
               <a:t>Water starts everything: enzymes digest the starch to glucose, the embryo respires and grows. Enzymes work faster when it is warm.</a:t>
             </a:r>
-            <a:endParaRPr lang="en-US" sz="1400" dirty="0"/>
+            <a:endParaRPr lang="en-US" sz="1700" dirty="0"/>
           </a:p>
         </p:txBody>
       </p:sp>
@@ -7651,8 +7548,8 @@
         </p:nvSpPr>
         <p:spPr>
           <a:xfrm>
-            <a:off x="548640" y="6053328"/>
-            <a:ext cx="9601200" cy="292608"/>
+            <a:off x="548640" y="6035040"/>
+            <a:ext cx="9601200" cy="310896"/>
           </a:xfrm>
           <a:prstGeom prst="rect">
             <a:avLst/>
@@ -7668,7 +7565,7 @@
               <a:buNone/>
             </a:pPr>
             <a:r>
-              <a:rPr lang="en-US" sz="1200" b="1" dirty="0">
+              <a:rPr lang="en-US" sz="1400" b="1" dirty="0">
                 <a:solidFill>
                   <a:srgbClr val="7B3A8E"/>
                 </a:solidFill>
@@ -7679,14 +7576,14 @@
               <a:buNone/>
             </a:pPr>
             <a:r>
-              <a:rPr lang="en-US" sz="1200" dirty="0">
+              <a:rPr lang="en-US" sz="1400" dirty="0">
                 <a:solidFill>
                   <a:srgbClr val="7B3A8E"/>
                 </a:solidFill>
               </a:rPr>
               <a:t>iodine solution   ·   Benedict's solution</a:t>
             </a:r>
-            <a:endParaRPr lang="en-US" sz="1200" dirty="0"/>
+            <a:endParaRPr lang="en-US" sz="1400" dirty="0"/>
           </a:p>
         </p:txBody>
       </p:sp>
@@ -7708,81 +7605,79 @@
           <a:ln/>
         </p:spPr>
         <p:txBody>
-          <a:bodyPr wrap="square" lIns="0" tIns="0" rIns="0" bIns="0" rtlCol="0" anchor="t">
-            <a:normAutofit/>
-          </a:bodyPr>
-          <a:lstStyle/>
-          <a:p>
-            <a:pPr marL="228600" indent="-228600">
+          <a:bodyPr wrap="square" lIns="0" tIns="0" rIns="0" bIns="0" rtlCol="0" anchor="t"/>
+          <a:lstStyle/>
+          <a:p>
+            <a:pPr marL="304800" indent="-304800">
               <a:spcAft>
-                <a:spcPts val="600"/>
+                <a:spcPts val="800"/>
               </a:spcAft>
               <a:buSzPct val="100000"/>
               <a:buChar char="•"/>
             </a:pPr>
             <a:r>
-              <a:rPr lang="en-US" sz="1700" dirty="0">
+              <a:rPr lang="en-US" sz="2000" dirty="0">
                 <a:solidFill>
                   <a:srgbClr val="141B26"/>
                 </a:solidFill>
               </a:rPr>
               <a:t>Iodine solution turns from orange-brown to blue-black with starch.</a:t>
             </a:r>
-            <a:endParaRPr lang="en-US" sz="1700" dirty="0"/>
-          </a:p>
-          <a:p>
-            <a:pPr marL="228600" indent="-228600">
+            <a:endParaRPr lang="en-US" sz="2000" dirty="0"/>
+          </a:p>
+          <a:p>
+            <a:pPr marL="304800" indent="-304800">
               <a:spcAft>
-                <a:spcPts val="600"/>
+                <a:spcPts val="800"/>
               </a:spcAft>
               <a:buSzPct val="100000"/>
               <a:buChar char="•"/>
             </a:pPr>
             <a:r>
-              <a:rPr lang="en-US" sz="1700" dirty="0">
+              <a:rPr lang="en-US" sz="2000" dirty="0">
                 <a:solidFill>
                   <a:srgbClr val="141B26"/>
                 </a:solidFill>
               </a:rPr>
               <a:t>Only the green parts of a variegated leaf go blue-black: starch is made where there is chlorophyll.</a:t>
             </a:r>
-            <a:endParaRPr lang="en-US" sz="1700" dirty="0"/>
-          </a:p>
-          <a:p>
-            <a:pPr marL="228600" indent="-228600">
+            <a:endParaRPr lang="en-US" sz="2000" dirty="0"/>
+          </a:p>
+          <a:p>
+            <a:pPr marL="304800" indent="-304800">
               <a:spcAft>
-                <a:spcPts val="600"/>
+                <a:spcPts val="800"/>
               </a:spcAft>
               <a:buSzPct val="100000"/>
               <a:buChar char="•"/>
             </a:pPr>
             <a:r>
-              <a:rPr lang="en-US" sz="1700" dirty="0">
+              <a:rPr lang="en-US" sz="2000" dirty="0">
                 <a:solidFill>
                   <a:srgbClr val="141B26"/>
                 </a:solidFill>
               </a:rPr>
               <a:t>Benedict's solution is blue. Heated with glucose it turns green, then orange-red.</a:t>
             </a:r>
-            <a:endParaRPr lang="en-US" sz="1700" dirty="0"/>
-          </a:p>
-          <a:p>
-            <a:pPr marL="228600" indent="-228600">
+            <a:endParaRPr lang="en-US" sz="2000" dirty="0"/>
+          </a:p>
+          <a:p>
+            <a:pPr marL="304800" indent="-304800">
               <a:spcAft>
-                <a:spcPts val="600"/>
+                <a:spcPts val="800"/>
               </a:spcAft>
               <a:buSzPct val="100000"/>
               <a:buChar char="•"/>
             </a:pPr>
             <a:r>
-              <a:rPr lang="en-US" sz="1700" dirty="0">
+              <a:rPr lang="en-US" sz="2000" dirty="0">
                 <a:solidFill>
                   <a:srgbClr val="141B26"/>
                 </a:solidFill>
               </a:rPr>
               <a:t>Both tests are used to check what a seed or a leaf contains.</a:t>
             </a:r>
-            <a:endParaRPr lang="en-US" sz="1700" dirty="0"/>
+            <a:endParaRPr lang="en-US" sz="2000" dirty="0"/>
           </a:p>
         </p:txBody>
       </p:sp>
@@ -7829,16 +7724,14 @@
           <a:ln/>
         </p:spPr>
         <p:txBody>
-          <a:bodyPr wrap="square" lIns="0" tIns="0" rIns="0" bIns="0" rtlCol="0" anchor="ctr">
-            <a:normAutofit/>
-          </a:bodyPr>
+          <a:bodyPr wrap="square" lIns="0" tIns="0" rIns="0" bIns="0" rtlCol="0" anchor="ctr"/>
           <a:lstStyle/>
           <a:p>
             <a:pPr indent="0" marL="0">
               <a:buNone/>
             </a:pPr>
             <a:r>
-              <a:rPr lang="en-US" sz="1400" b="1" dirty="0">
+              <a:rPr lang="en-US" sz="1700" b="1" dirty="0">
                 <a:solidFill>
                   <a:srgbClr val="7B3A8E"/>
                 </a:solidFill>
@@ -7849,14 +7742,14 @@
               <a:buNone/>
             </a:pPr>
             <a:r>
-              <a:rPr lang="en-US" sz="1400" dirty="0">
+              <a:rPr lang="en-US" sz="1700" dirty="0">
                 <a:solidFill>
                   <a:srgbClr val="141B26"/>
                 </a:solidFill>
               </a:rPr>
               <a:t>Starch: iodine, blue-black. Glucose: Benedict's, heated, orange-red.</a:t>
             </a:r>
-            <a:endParaRPr lang="en-US" sz="1400" dirty="0"/>
+            <a:endParaRPr lang="en-US" sz="1700" dirty="0"/>
           </a:p>
         </p:txBody>
       </p:sp>
@@ -8056,14 +7949,14 @@
               <a:buNone/>
             </a:pPr>
             <a:r>
-              <a:rPr lang="en-US" sz="1400" i="1" dirty="0">
+              <a:rPr lang="en-US" sz="1600" i="1" dirty="0">
                 <a:solidFill>
                   <a:srgbClr val="5B6574"/>
                 </a:solidFill>
               </a:rPr>
               <a:t>Mini whiteboards. One answer each, then we check.</a:t>
             </a:r>
-            <a:endParaRPr lang="en-US" sz="1400" dirty="0"/>
+            <a:endParaRPr lang="en-US" sz="1600" dirty="0"/>
           </a:p>
         </p:txBody>
       </p:sp>
@@ -8112,16 +8005,14 @@
           <a:ln/>
         </p:spPr>
         <p:txBody>
-          <a:bodyPr wrap="square" lIns="0" tIns="0" rIns="0" bIns="0" rtlCol="0" anchor="ctr">
-            <a:normAutofit/>
-          </a:bodyPr>
+          <a:bodyPr wrap="square" lIns="0" tIns="0" rIns="0" bIns="0" rtlCol="0" anchor="ctr"/>
           <a:lstStyle/>
           <a:p>
             <a:pPr indent="0" marL="0">
               <a:buNone/>
             </a:pPr>
             <a:r>
-              <a:rPr lang="en-US" sz="1600" b="1" dirty="0">
+              <a:rPr lang="en-US" sz="2000" b="1" dirty="0">
                 <a:solidFill>
                   <a:srgbClr val="7B3A8E"/>
                 </a:solidFill>
@@ -8132,14 +8023,14 @@
               <a:buNone/>
             </a:pPr>
             <a:r>
-              <a:rPr lang="en-US" sz="1600" dirty="0">
+              <a:rPr lang="en-US" sz="2000" dirty="0">
                 <a:solidFill>
                   <a:srgbClr val="141B26"/>
                 </a:solidFill>
               </a:rPr>
               <a:t>Which polymer do plants make from glucose as an energy store?</a:t>
             </a:r>
-            <a:endParaRPr lang="en-US" sz="1600" dirty="0"/>
+            <a:endParaRPr lang="en-US" sz="2000" dirty="0"/>
           </a:p>
         </p:txBody>
       </p:sp>
@@ -8188,16 +8079,14 @@
           <a:ln/>
         </p:spPr>
         <p:txBody>
-          <a:bodyPr wrap="square" lIns="0" tIns="0" rIns="0" bIns="0" rtlCol="0" anchor="ctr">
-            <a:normAutofit/>
-          </a:bodyPr>
+          <a:bodyPr wrap="square" lIns="0" tIns="0" rIns="0" bIns="0" rtlCol="0" anchor="ctr"/>
           <a:lstStyle/>
           <a:p>
             <a:pPr indent="0" marL="0">
               <a:buNone/>
             </a:pPr>
             <a:r>
-              <a:rPr lang="en-US" sz="1600" b="1" dirty="0">
+              <a:rPr lang="en-US" sz="2000" b="1" dirty="0">
                 <a:solidFill>
                   <a:srgbClr val="7B3A8E"/>
                 </a:solidFill>
@@ -8208,14 +8097,14 @@
               <a:buNone/>
             </a:pPr>
             <a:r>
-              <a:rPr lang="en-US" sz="1600" dirty="0">
+              <a:rPr lang="en-US" sz="2000" dirty="0">
                 <a:solidFill>
                   <a:srgbClr val="141B26"/>
                 </a:solidFill>
               </a:rPr>
               <a:t>Which polymer builds plant cell walls?</a:t>
             </a:r>
-            <a:endParaRPr lang="en-US" sz="1600" dirty="0"/>
+            <a:endParaRPr lang="en-US" sz="2000" dirty="0"/>
           </a:p>
         </p:txBody>
       </p:sp>
@@ -8264,16 +8153,14 @@
           <a:ln/>
         </p:spPr>
         <p:txBody>
-          <a:bodyPr wrap="square" lIns="0" tIns="0" rIns="0" bIns="0" rtlCol="0" anchor="ctr">
-            <a:normAutofit/>
-          </a:bodyPr>
+          <a:bodyPr wrap="square" lIns="0" tIns="0" rIns="0" bIns="0" rtlCol="0" anchor="ctr"/>
           <a:lstStyle/>
           <a:p>
             <a:pPr indent="0" marL="0">
               <a:buNone/>
             </a:pPr>
             <a:r>
-              <a:rPr lang="en-US" sz="1600" b="1" dirty="0">
+              <a:rPr lang="en-US" sz="2000" b="1" dirty="0">
                 <a:solidFill>
                   <a:srgbClr val="7B3A8E"/>
                 </a:solidFill>
@@ -8284,14 +8171,14 @@
               <a:buNone/>
             </a:pPr>
             <a:r>
-              <a:rPr lang="en-US" sz="1600" dirty="0">
+              <a:rPr lang="en-US" sz="2000" dirty="0">
                 <a:solidFill>
                   <a:srgbClr val="141B26"/>
                 </a:solidFill>
               </a:rPr>
               <a:t>What are proteins made of?</a:t>
             </a:r>
-            <a:endParaRPr lang="en-US" sz="1600" dirty="0"/>
+            <a:endParaRPr lang="en-US" sz="2000" dirty="0"/>
           </a:p>
         </p:txBody>
       </p:sp>
@@ -8340,16 +8227,14 @@
           <a:ln/>
         </p:spPr>
         <p:txBody>
-          <a:bodyPr wrap="square" lIns="0" tIns="0" rIns="0" bIns="0" rtlCol="0" anchor="ctr">
-            <a:normAutofit/>
-          </a:bodyPr>
+          <a:bodyPr wrap="square" lIns="0" tIns="0" rIns="0" bIns="0" rtlCol="0" anchor="ctr"/>
           <a:lstStyle/>
           <a:p>
             <a:pPr indent="0" marL="0">
               <a:buNone/>
             </a:pPr>
             <a:r>
-              <a:rPr lang="en-US" sz="1600" b="1" dirty="0">
+              <a:rPr lang="en-US" sz="2000" b="1" dirty="0">
                 <a:solidFill>
                   <a:srgbClr val="7B3A8E"/>
                 </a:solidFill>
@@ -8360,14 +8245,14 @@
               <a:buNone/>
             </a:pPr>
             <a:r>
-              <a:rPr lang="en-US" sz="1600" dirty="0">
+              <a:rPr lang="en-US" sz="2000" dirty="0">
                 <a:solidFill>
                   <a:srgbClr val="141B26"/>
                 </a:solidFill>
               </a:rPr>
               <a:t>Which mineral salt supplies the nitrogen for amino acids?</a:t>
             </a:r>
-            <a:endParaRPr lang="en-US" sz="1600" dirty="0"/>
+            <a:endParaRPr lang="en-US" sz="2000" dirty="0"/>
           </a:p>
         </p:txBody>
       </p:sp>
@@ -8416,16 +8301,14 @@
           <a:ln/>
         </p:spPr>
         <p:txBody>
-          <a:bodyPr wrap="square" lIns="0" tIns="0" rIns="0" bIns="0" rtlCol="0" anchor="ctr">
-            <a:normAutofit/>
-          </a:bodyPr>
+          <a:bodyPr wrap="square" lIns="0" tIns="0" rIns="0" bIns="0" rtlCol="0" anchor="ctr"/>
           <a:lstStyle/>
           <a:p>
             <a:pPr indent="0" marL="0">
               <a:buNone/>
             </a:pPr>
             <a:r>
-              <a:rPr lang="en-US" sz="1600" b="1" dirty="0">
+              <a:rPr lang="en-US" sz="2000" b="1" dirty="0">
                 <a:solidFill>
                   <a:srgbClr val="7B3A8E"/>
                 </a:solidFill>
@@ -8436,14 +8319,14 @@
               <a:buNone/>
             </a:pPr>
             <a:r>
-              <a:rPr lang="en-US" sz="1600" dirty="0">
+              <a:rPr lang="en-US" sz="2000" dirty="0">
                 <a:solidFill>
                   <a:srgbClr val="141B26"/>
                 </a:solidFill>
               </a:rPr>
               <a:t>What colour does iodine solution turn with starch?</a:t>
             </a:r>
-            <a:endParaRPr lang="en-US" sz="1600" dirty="0"/>
+            <a:endParaRPr lang="en-US" sz="2000" dirty="0"/>
           </a:p>
         </p:txBody>
       </p:sp>
